--- a/protected-downloads/praesentation/VA09.pptx
+++ b/protected-downloads/praesentation/VA09.pptx
@@ -3925,7 +3925,7 @@
                 <a:solidFill>
                   <a:srgbClr val="C8D2E6"/>
                 </a:solidFill>
-                <a:latin typeface="JetBrains Mono"/>
+                <a:latin typeface="Consolas"/>
               </a:rPr>
               <a:t>FKB CAMPUS  ·  FIRMENKUNDENAKADEMIE  ·  VA09</a:t>
             </a:r>
@@ -3960,7 +3960,7 @@
                 <a:solidFill>
                   <a:srgbClr val="FFFFFF"/>
                 </a:solidFill>
-                <a:latin typeface="Source Serif 4"/>
+                <a:latin typeface="Arial"/>
               </a:rPr>
               <a:t>Vertriebsanlässe erkennen und für den Berater aufbereiten</a:t>
             </a:r>
@@ -3995,7 +3995,7 @@
                 <a:solidFill>
                   <a:srgbClr val="BECDE6"/>
                 </a:solidFill>
-                <a:latin typeface="Source Serif 4"/>
+                <a:latin typeface="Arial"/>
               </a:rPr>
               <a:t>Aus Bestandsdaten Beratungschancen machen – die Co-Pilot-Rolle der Assistenz</a:t>
             </a:r>
@@ -4073,7 +4073,7 @@
                 <a:solidFill>
                   <a:srgbClr val="A0B4D2"/>
                 </a:solidFill>
-                <a:latin typeface="JetBrains Mono"/>
+                <a:latin typeface="Consolas"/>
               </a:rPr>
               <a:t>KOMPETENZFELD</a:t>
             </a:r>
@@ -4143,7 +4143,7 @@
                 <a:solidFill>
                   <a:srgbClr val="A0B4D2"/>
                 </a:solidFill>
-                <a:latin typeface="JetBrains Mono"/>
+                <a:latin typeface="Consolas"/>
               </a:rPr>
               <a:t>KOMPETENZSTUFE</a:t>
             </a:r>
@@ -4213,7 +4213,7 @@
                 <a:solidFill>
                   <a:srgbClr val="A0B4D2"/>
                 </a:solidFill>
-                <a:latin typeface="JetBrains Mono"/>
+                <a:latin typeface="Consolas"/>
               </a:rPr>
               <a:t>VERSION</a:t>
             </a:r>
@@ -4326,7 +4326,7 @@
                 <a:solidFill>
                   <a:srgbClr val="96A5BE"/>
                 </a:solidFill>
-                <a:latin typeface="JetBrains Mono"/>
+                <a:latin typeface="Consolas"/>
               </a:rPr>
               <a:t>FKB Campus  ·  2026</a:t>
             </a:r>
@@ -4361,7 +4361,7 @@
                 <a:solidFill>
                   <a:srgbClr val="96A5BE"/>
                 </a:solidFill>
-                <a:latin typeface="JetBrains Mono"/>
+                <a:latin typeface="Consolas"/>
               </a:rPr>
               <a:t>Trainer-Präsentation</a:t>
             </a:r>
@@ -4500,7 +4500,7 @@
                 <a:solidFill>
                   <a:srgbClr val="78808C"/>
                 </a:solidFill>
-                <a:latin typeface="JetBrains Mono"/>
+                <a:latin typeface="Consolas"/>
               </a:rPr>
               <a:t>ÜBERBLICK  ·  VA09</a:t>
             </a:r>
@@ -4578,7 +4578,7 @@
                 <a:solidFill>
                   <a:srgbClr val="1F2C56"/>
                 </a:solidFill>
-                <a:latin typeface="Source Serif 4"/>
+                <a:latin typeface="Arial"/>
               </a:rPr>
               <a:t>Worum geht es heute</a:t>
             </a:r>
@@ -4727,7 +4727,7 @@
                 <a:solidFill>
                   <a:srgbClr val="A0B4D2"/>
                 </a:solidFill>
-                <a:latin typeface="JetBrains Mono"/>
+                <a:latin typeface="Consolas"/>
               </a:rPr>
               <a:t>FKB Campus  ·  VA09</a:t>
             </a:r>
@@ -4866,7 +4866,7 @@
                 <a:solidFill>
                   <a:srgbClr val="78808C"/>
                 </a:solidFill>
-                <a:latin typeface="JetBrains Mono"/>
+                <a:latin typeface="Consolas"/>
               </a:rPr>
               <a:t>LERNZIELE  ·  VA09</a:t>
             </a:r>
@@ -4944,7 +4944,7 @@
                 <a:solidFill>
                   <a:srgbClr val="1F2C56"/>
                 </a:solidFill>
-                <a:latin typeface="Source Serif 4"/>
+                <a:latin typeface="Arial"/>
               </a:rPr>
               <a:t>Was Sie heute mitnehmen</a:t>
             </a:r>
@@ -5140,7 +5140,7 @@
                 <a:solidFill>
                   <a:srgbClr val="A0B4D2"/>
                 </a:solidFill>
-                <a:latin typeface="JetBrains Mono"/>
+                <a:latin typeface="Consolas"/>
               </a:rPr>
               <a:t>FKB Campus  ·  VA09</a:t>
             </a:r>
@@ -5279,7 +5279,7 @@
                 <a:solidFill>
                   <a:srgbClr val="78808C"/>
                 </a:solidFill>
-                <a:latin typeface="JetBrains Mono"/>
+                <a:latin typeface="Consolas"/>
               </a:rPr>
               <a:t>AGENDA  ·  VA09</a:t>
             </a:r>
@@ -5357,7 +5357,7 @@
                 <a:solidFill>
                   <a:srgbClr val="1F2C56"/>
                 </a:solidFill>
-                <a:latin typeface="Source Serif 4"/>
+                <a:latin typeface="Arial"/>
               </a:rPr>
               <a:t>So läuft das Modul</a:t>
             </a:r>
@@ -5791,7 +5791,7 @@
                 <a:solidFill>
                   <a:srgbClr val="A0B4D2"/>
                 </a:solidFill>
-                <a:latin typeface="JetBrains Mono"/>
+                <a:latin typeface="Consolas"/>
               </a:rPr>
               <a:t>FKB Campus  ·  VA09</a:t>
             </a:r>
@@ -5930,7 +5930,7 @@
                 <a:solidFill>
                   <a:srgbClr val="78808C"/>
                 </a:solidFill>
-                <a:latin typeface="JetBrains Mono"/>
+                <a:latin typeface="Consolas"/>
               </a:rPr>
               <a:t>VA09  ·  INHALT</a:t>
             </a:r>
@@ -6051,7 +6051,7 @@
                 <a:solidFill>
                   <a:srgbClr val="1F2C56"/>
                 </a:solidFill>
-                <a:latin typeface="Source Serif 4"/>
+                <a:latin typeface="Arial"/>
               </a:rPr>
               <a:t>Theorie-Input: Anlässe und der Hausbankvorteil</a:t>
             </a:r>
@@ -6067,7 +6067,7 @@
         <p:spPr>
           <a:xfrm>
             <a:off x="685800" y="1417320"/>
-            <a:ext cx="10817352" cy="5029200"/>
+            <a:ext cx="10817352" cy="4892040"/>
           </a:xfrm>
           <a:prstGeom prst="rect">
             <a:avLst/>
@@ -6075,12 +6075,12 @@
           <a:noFill/>
         </p:spPr>
         <p:txBody>
-          <a:bodyPr wrap="square">
+          <a:bodyPr wrap="square" anchor="ctr">
             <a:spAutoFit/>
           </a:bodyPr>
           <a:lstStyle/>
           <a:p>
-            <a:pPr>
+            <a:pPr marL="190500" indent="-190500">
               <a:spcBef>
                 <a:spcPts val="400"/>
               </a:spcBef>
@@ -6171,7 +6171,7 @@
                 <a:solidFill>
                   <a:srgbClr val="A0B4D2"/>
                 </a:solidFill>
-                <a:latin typeface="JetBrains Mono"/>
+                <a:latin typeface="Consolas"/>
               </a:rPr>
               <a:t>FKB Campus  ·  VA09</a:t>
             </a:r>
@@ -6310,7 +6310,7 @@
                 <a:solidFill>
                   <a:srgbClr val="78808C"/>
                 </a:solidFill>
-                <a:latin typeface="JetBrains Mono"/>
+                <a:latin typeface="Consolas"/>
               </a:rPr>
               <a:t>VA09  ·  ÜBERSICHT</a:t>
             </a:r>
@@ -6345,7 +6345,7 @@
                 <a:solidFill>
                   <a:srgbClr val="1F2C56"/>
                 </a:solidFill>
-                <a:latin typeface="Source Serif 4"/>
+                <a:latin typeface="Arial"/>
               </a:rPr>
               <a:t>Theorie-Input: Anlässe und der Hausbankvorteil</a:t>
             </a:r>
@@ -6897,7 +6897,7 @@
                 <a:solidFill>
                   <a:srgbClr val="A0B4D2"/>
                 </a:solidFill>
-                <a:latin typeface="JetBrains Mono"/>
+                <a:latin typeface="Consolas"/>
               </a:rPr>
               <a:t>FKB Campus  ·  VA09</a:t>
             </a:r>
@@ -6932,7 +6932,7 @@
                 <a:solidFill>
                   <a:srgbClr val="A0B4D2"/>
                 </a:solidFill>
-                <a:latin typeface="JetBrains Mono"/>
+                <a:latin typeface="Consolas"/>
               </a:rPr>
               <a:t>Übersicht</a:t>
             </a:r>
@@ -7071,7 +7071,7 @@
                 <a:solidFill>
                   <a:srgbClr val="78808C"/>
                 </a:solidFill>
-                <a:latin typeface="JetBrains Mono"/>
+                <a:latin typeface="Consolas"/>
               </a:rPr>
               <a:t>VA09  ·  INHALT</a:t>
             </a:r>
@@ -7192,7 +7192,7 @@
                 <a:solidFill>
                   <a:srgbClr val="1F2C56"/>
                 </a:solidFill>
-                <a:latin typeface="Source Serif 4"/>
+                <a:latin typeface="Arial"/>
               </a:rPr>
               <a:t>Theorie-Input: Signal oder Rauschen?</a:t>
             </a:r>
@@ -7208,7 +7208,7 @@
         <p:spPr>
           <a:xfrm>
             <a:off x="685800" y="1417320"/>
-            <a:ext cx="10817352" cy="5029200"/>
+            <a:ext cx="10817352" cy="4892040"/>
           </a:xfrm>
           <a:prstGeom prst="rect">
             <a:avLst/>
@@ -7216,12 +7216,12 @@
           <a:noFill/>
         </p:spPr>
         <p:txBody>
-          <a:bodyPr wrap="square">
+          <a:bodyPr wrap="square" anchor="ctr">
             <a:spAutoFit/>
           </a:bodyPr>
           <a:lstStyle/>
           <a:p>
-            <a:pPr>
+            <a:pPr marL="177800" indent="-177800">
               <a:spcBef>
                 <a:spcPts val="600"/>
               </a:spcBef>
@@ -7312,7 +7312,7 @@
                 <a:solidFill>
                   <a:srgbClr val="A0B4D2"/>
                 </a:solidFill>
-                <a:latin typeface="JetBrains Mono"/>
+                <a:latin typeface="Consolas"/>
               </a:rPr>
               <a:t>FKB Campus  ·  VA09</a:t>
             </a:r>
@@ -7451,7 +7451,7 @@
                 <a:solidFill>
                   <a:srgbClr val="78808C"/>
                 </a:solidFill>
-                <a:latin typeface="JetBrains Mono"/>
+                <a:latin typeface="Consolas"/>
               </a:rPr>
               <a:t>VA09  ·  ARBEITSBLATT</a:t>
             </a:r>
@@ -7572,7 +7572,7 @@
                 <a:solidFill>
                   <a:srgbClr val="1F2C56"/>
                 </a:solidFill>
-                <a:latin typeface="Source Serif 4"/>
+                <a:latin typeface="Arial"/>
               </a:rPr>
               <a:t>Praxisfall: Anlass-Screening im Portfolio</a:t>
             </a:r>
@@ -7601,7 +7601,7 @@
           </a:bodyPr>
           <a:lstStyle/>
           <a:p>
-            <a:pPr>
+            <a:pPr marL="190500" indent="-190500">
               <a:spcBef>
                 <a:spcPts val="400"/>
               </a:spcBef>
@@ -7620,7 +7620,7 @@
             </a:r>
           </a:p>
           <a:p>
-            <a:pPr>
+            <a:pPr marL="190500" indent="-190500">
               <a:spcBef>
                 <a:spcPts val="400"/>
               </a:spcBef>
@@ -7639,7 +7639,7 @@
             </a:r>
           </a:p>
           <a:p>
-            <a:pPr>
+            <a:pPr marL="190500" indent="-190500">
               <a:spcBef>
                 <a:spcPts val="400"/>
               </a:spcBef>
@@ -7658,7 +7658,7 @@
             </a:r>
           </a:p>
           <a:p>
-            <a:pPr>
+            <a:pPr marL="190500" indent="-190500">
               <a:spcBef>
                 <a:spcPts val="400"/>
               </a:spcBef>
@@ -7677,7 +7677,7 @@
             </a:r>
           </a:p>
           <a:p>
-            <a:pPr>
+            <a:pPr marL="190500" indent="-190500">
               <a:spcBef>
                 <a:spcPts val="400"/>
               </a:spcBef>
@@ -7846,7 +7846,7 @@
                 <a:solidFill>
                   <a:srgbClr val="A0B4D2"/>
                 </a:solidFill>
-                <a:latin typeface="JetBrains Mono"/>
+                <a:latin typeface="Consolas"/>
               </a:rPr>
               <a:t>FKB Campus  ·  VA09</a:t>
             </a:r>
@@ -7985,7 +7985,7 @@
                 <a:solidFill>
                   <a:srgbClr val="78808C"/>
                 </a:solidFill>
-                <a:latin typeface="JetBrains Mono"/>
+                <a:latin typeface="Consolas"/>
               </a:rPr>
               <a:t>VA09  ·  INHALT</a:t>
             </a:r>
@@ -8106,7 +8106,7 @@
                 <a:solidFill>
                   <a:srgbClr val="1F2C56"/>
                 </a:solidFill>
-                <a:latin typeface="Source Serif 4"/>
+                <a:latin typeface="Arial"/>
               </a:rPr>
               <a:t>Reflexionsfragen</a:t>
             </a:r>
@@ -8122,7 +8122,7 @@
         <p:spPr>
           <a:xfrm>
             <a:off x="685800" y="1417320"/>
-            <a:ext cx="10817352" cy="5029200"/>
+            <a:ext cx="10817352" cy="4892040"/>
           </a:xfrm>
           <a:prstGeom prst="rect">
             <a:avLst/>
@@ -8130,12 +8130,12 @@
           <a:noFill/>
         </p:spPr>
         <p:txBody>
-          <a:bodyPr wrap="square">
+          <a:bodyPr wrap="square" anchor="ctr">
             <a:spAutoFit/>
           </a:bodyPr>
           <a:lstStyle/>
           <a:p>
-            <a:pPr>
+            <a:pPr marL="190500" indent="-190500">
               <a:spcBef>
                 <a:spcPts val="400"/>
               </a:spcBef>
@@ -8154,7 +8154,7 @@
             </a:r>
           </a:p>
           <a:p>
-            <a:pPr>
+            <a:pPr marL="190500" indent="-190500">
               <a:spcBef>
                 <a:spcPts val="400"/>
               </a:spcBef>
@@ -8173,7 +8173,7 @@
             </a:r>
           </a:p>
           <a:p>
-            <a:pPr>
+            <a:pPr marL="190500" indent="-190500">
               <a:spcBef>
                 <a:spcPts val="400"/>
               </a:spcBef>
@@ -8264,7 +8264,7 @@
                 <a:solidFill>
                   <a:srgbClr val="A0B4D2"/>
                 </a:solidFill>
-                <a:latin typeface="JetBrains Mono"/>
+                <a:latin typeface="Consolas"/>
               </a:rPr>
               <a:t>FKB Campus  ·  VA09</a:t>
             </a:r>

--- a/protected-downloads/praesentation/VA09.pptx
+++ b/protected-downloads/praesentation/VA09.pptx
@@ -14,6 +14,13 @@
     <p:sldId id="262" r:id="rId14"/>
     <p:sldId id="263" r:id="rId15"/>
     <p:sldId id="264" r:id="rId16"/>
+    <p:sldId id="265" r:id="rId17"/>
+    <p:sldId id="266" r:id="rId18"/>
+    <p:sldId id="267" r:id="rId19"/>
+    <p:sldId id="268" r:id="rId20"/>
+    <p:sldId id="269" r:id="rId21"/>
+    <p:sldId id="270" r:id="rId22"/>
+    <p:sldId id="271" r:id="rId23"/>
   </p:sldIdLst>
   <p:sldSz cx="12188952" cy="6858000" type="screen4x3"/>
   <p:notesSz cx="6858000" cy="9144000"/>
@@ -580,7 +587,7 @@
           <a:lstStyle/>
           <a:p>
             <a:r>
-              <a:t>Siehe Trainerhandbuch (Sektion 3) für Moderationshinweise, Timing und erwartete Teilnehmerreaktionen.</a:t>
+              <a:t>Erwartungsabfrage: „Was ist für Sie ein guter Anlass – und wann nervt so ein Hinweis nur?" Relationship-Lending-Logik in drei Sätzen: die Hausbank sieht die Daten früher.</a:t>
             </a:r>
           </a:p>
         </p:txBody>
@@ -650,7 +657,7 @@
           <a:lstStyle/>
           <a:p>
             <a:r>
-              <a:t>Siehe Trainerhandbuch (Sektion 3) für Moderationshinweise, Timing und erwartete Teilnehmerreaktionen.</a:t>
+              <a:t>Anlasstypen-Tabelle zeigen, dann zwei Praxisbeispiele aus dem Plenum ergänzen lassen.</a:t>
             </a:r>
           </a:p>
         </p:txBody>
@@ -720,22 +727,7 @@
           <a:lstStyle/>
           <a:p>
             <a:r>
-              <a:t>AB-2 Musterlösung (Trainer-Version)</a:t>
-            </a:r>
-          </a:p>
-          <a:p>
-            <a:r>
-              <a:t>Hohe Relevanz: Möbel Musterregion (dauerhaft &gt; 90 % über 4 Monate = belastbar, akuter Erweiterungs-/Strukturbedarf) und Stahlbau Musterregion (Inhaber 63 ohne Nachfolge = strategisch hoher, zeitkritischer Anlass; Brücke zu M12/M24). Mittlere Relevanz: Dental Musterregion (1,2 Mio. EUR unbewegt = klarer Anlage-/Verbundanlass, aber weniger dringend). Kein Anlass: Gastro Musterregion – die hohe Dezemberzahlung ist saisonal (Weihnachtsgeschäft) erklärbar und damit Datenrauschen.</a:t>
-            </a:r>
-          </a:p>
-          <a:p>
-            <a:r>
-              <a:t>Kernbefund: Der Co-Pilot liefert nicht möglichst viele, sondern die richtigen Anlässe – belastbar, relevant, entscheidungsreif aufbereitet. Das Aussortieren des saisonalen Rauschens ist genauso wertvoll wie das Erkennen der echten Anlässe.</a:t>
-            </a:r>
-          </a:p>
-          <a:p>
-            <a:r>
-              <a:t>Trainer-Hinweis: Der Gastro-Fall ist die Lernpointe: Disziplin im Aussortieren schafft beim Berater Vertrauen in die Anlässe. Betonen Sie die Co-Pilot-Haltung – proaktiv, aber qualitätsbewusst. Datenzugriff/Auswertungen sind installationsabhängig; mit anonymisiertem Demo-Datensatz arbeiten (DSGVO).</a:t>
+              <a:t>Leitfrage: „Wann macht ein guter Anlass den Berater froh – und wann kostet er nur Zeit?" Ein Nein bei einer der drei Fragen = Rauschen, nicht weitergeben.</a:t>
             </a:r>
           </a:p>
         </p:txBody>
@@ -805,7 +797,297 @@
           <a:lstStyle/>
           <a:p>
             <a:r>
-              <a:t>Siehe Trainerhandbuch (Sektion 3) für Moderationshinweise, Timing und erwartete Teilnehmerreaktionen.</a:t>
+              <a:t>Kernbotschaft: Gastro-Fall = Rauschen (Saisonalität), nicht weitergeben. Das Aussortieren ist genauso wertvoll wie das Erkennen.</a:t>
+            </a:r>
+          </a:p>
+        </p:txBody>
+      </p:sp>
+      <p:sp>
+        <p:nvSpPr>
+          <p:cNvPr id="4" name="Slide Number Placeholder 3"/>
+          <p:cNvSpPr>
+            <a:spLocks noGrp="1"/>
+          </p:cNvSpPr>
+          <p:nvPr>
+            <p:ph type="sldNum" idx="5" sz="quarter"/>
+          </p:nvPr>
+        </p:nvSpPr>
+        <p:spPr/>
+      </p:sp>
+    </p:spTree>
+  </p:cSld>
+  <p:clrMapOvr>
+    <a:masterClrMapping/>
+  </p:clrMapOvr>
+</p:notes>
+</file>
+
+<file path=ppt/notesSlides/notesSlide6.xml><?xml version="1.0" encoding="utf-8"?>
+<p:notes xmlns:a="http://schemas.openxmlformats.org/drawingml/2006/main" xmlns:p="http://schemas.openxmlformats.org/presentationml/2006/main" xmlns:r="http://schemas.openxmlformats.org/officeDocument/2006/relationships">
+  <p:cSld>
+    <p:spTree>
+      <p:nvGrpSpPr>
+        <p:cNvPr id="1" name=""/>
+        <p:cNvGrpSpPr/>
+        <p:nvPr/>
+      </p:nvGrpSpPr>
+      <p:grpSpPr>
+        <a:xfrm>
+          <a:off x="0" y="0"/>
+          <a:ext cx="0" cy="0"/>
+          <a:chOff x="0" y="0"/>
+          <a:chExt cx="0" cy="0"/>
+        </a:xfrm>
+      </p:grpSpPr>
+      <p:sp>
+        <p:nvSpPr>
+          <p:cNvPr id="2" name="Slide Image Placeholder 1"/>
+          <p:cNvSpPr>
+            <a:spLocks noGrp="1"/>
+          </p:cNvSpPr>
+          <p:nvPr>
+            <p:ph type="sldImg" idx="2"/>
+          </p:nvPr>
+        </p:nvSpPr>
+        <p:spPr/>
+      </p:sp>
+      <p:sp>
+        <p:nvSpPr>
+          <p:cNvPr id="3" name="Notes Placeholder 2"/>
+          <p:cNvSpPr>
+            <a:spLocks noGrp="1"/>
+          </p:cNvSpPr>
+          <p:nvPr>
+            <p:ph type="body" idx="3" sz="quarter"/>
+          </p:nvPr>
+        </p:nvSpPr>
+        <p:spPr/>
+        <p:txBody>
+          <a:bodyPr/>
+          <a:lstStyle/>
+          <a:p>
+            <a:r>
+              <a:t>Aufbereitungsstruktur je Anlass: Kurzprofil + Beleg (Datenpunkt) + Empfehlung/Gesprächsanlass + Timing. Ohne Verbundkenntnis bewusst nur den Gesprächsanlass statt eines Produktvorschlags formulieren.</a:t>
+            </a:r>
+          </a:p>
+        </p:txBody>
+      </p:sp>
+      <p:sp>
+        <p:nvSpPr>
+          <p:cNvPr id="4" name="Slide Number Placeholder 3"/>
+          <p:cNvSpPr>
+            <a:spLocks noGrp="1"/>
+          </p:cNvSpPr>
+          <p:nvPr>
+            <p:ph type="sldNum" idx="5" sz="quarter"/>
+          </p:nvPr>
+        </p:nvSpPr>
+        <p:spPr/>
+      </p:sp>
+    </p:spTree>
+  </p:cSld>
+  <p:clrMapOvr>
+    <a:masterClrMapping/>
+  </p:clrMapOvr>
+</p:notes>
+</file>
+
+<file path=ppt/notesSlides/notesSlide7.xml><?xml version="1.0" encoding="utf-8"?>
+<p:notes xmlns:a="http://schemas.openxmlformats.org/drawingml/2006/main" xmlns:p="http://schemas.openxmlformats.org/presentationml/2006/main" xmlns:r="http://schemas.openxmlformats.org/officeDocument/2006/relationships">
+  <p:cSld>
+    <p:spTree>
+      <p:nvGrpSpPr>
+        <p:cNvPr id="1" name=""/>
+        <p:cNvGrpSpPr/>
+        <p:nvPr/>
+      </p:nvGrpSpPr>
+      <p:grpSpPr>
+        <a:xfrm>
+          <a:off x="0" y="0"/>
+          <a:ext cx="0" cy="0"/>
+          <a:chOff x="0" y="0"/>
+          <a:chExt cx="0" cy="0"/>
+        </a:xfrm>
+      </p:grpSpPr>
+      <p:sp>
+        <p:nvSpPr>
+          <p:cNvPr id="2" name="Slide Image Placeholder 1"/>
+          <p:cNvSpPr>
+            <a:spLocks noGrp="1"/>
+          </p:cNvSpPr>
+          <p:nvPr>
+            <p:ph type="sldImg" idx="2"/>
+          </p:nvPr>
+        </p:nvSpPr>
+        <p:spPr/>
+      </p:sp>
+      <p:sp>
+        <p:nvSpPr>
+          <p:cNvPr id="3" name="Notes Placeholder 2"/>
+          <p:cNvSpPr>
+            <a:spLocks noGrp="1"/>
+          </p:cNvSpPr>
+          <p:nvPr>
+            <p:ph type="body" idx="3" sz="quarter"/>
+          </p:nvPr>
+        </p:nvSpPr>
+        <p:spPr/>
+        <p:txBody>
+          <a:bodyPr/>
+          <a:lstStyle/>
+          <a:p>
+            <a:r>
+              <a:t>AB-2/AB-3 Musterlösung (Trainer-Version)</a:t>
+            </a:r>
+          </a:p>
+          <a:p>
+            <a:r>
+              <a:t>Stärkster Anlass: Stahlbau (Nachfolge, Inhaber 63) – als Nachfolge-Anlass markieren (Bewertung/Nachfolge, vgl. M12/M24). Gastro = Rauschen (Saisonalität).</a:t>
+            </a:r>
+          </a:p>
+          <a:p>
+            <a:r>
+              <a:t>Trainer-Hinweis: Co-Pilot-Botschaft betonen – das Aussortieren ist genauso wertvoll wie das Erkennen.</a:t>
+            </a:r>
+          </a:p>
+        </p:txBody>
+      </p:sp>
+      <p:sp>
+        <p:nvSpPr>
+          <p:cNvPr id="4" name="Slide Number Placeholder 3"/>
+          <p:cNvSpPr>
+            <a:spLocks noGrp="1"/>
+          </p:cNvSpPr>
+          <p:nvPr>
+            <p:ph type="sldNum" idx="5" sz="quarter"/>
+          </p:nvPr>
+        </p:nvSpPr>
+        <p:spPr/>
+      </p:sp>
+    </p:spTree>
+  </p:cSld>
+  <p:clrMapOvr>
+    <a:masterClrMapping/>
+  </p:clrMapOvr>
+</p:notes>
+</file>
+
+<file path=ppt/notesSlides/notesSlide8.xml><?xml version="1.0" encoding="utf-8"?>
+<p:notes xmlns:a="http://schemas.openxmlformats.org/drawingml/2006/main" xmlns:p="http://schemas.openxmlformats.org/presentationml/2006/main" xmlns:r="http://schemas.openxmlformats.org/officeDocument/2006/relationships">
+  <p:cSld>
+    <p:spTree>
+      <p:nvGrpSpPr>
+        <p:cNvPr id="1" name=""/>
+        <p:cNvGrpSpPr/>
+        <p:nvPr/>
+      </p:nvGrpSpPr>
+      <p:grpSpPr>
+        <a:xfrm>
+          <a:off x="0" y="0"/>
+          <a:ext cx="0" cy="0"/>
+          <a:chOff x="0" y="0"/>
+          <a:chExt cx="0" cy="0"/>
+        </a:xfrm>
+      </p:grpSpPr>
+      <p:sp>
+        <p:nvSpPr>
+          <p:cNvPr id="2" name="Slide Image Placeholder 1"/>
+          <p:cNvSpPr>
+            <a:spLocks noGrp="1"/>
+          </p:cNvSpPr>
+          <p:nvPr>
+            <p:ph type="sldImg" idx="2"/>
+          </p:nvPr>
+        </p:nvSpPr>
+        <p:spPr/>
+      </p:sp>
+      <p:sp>
+        <p:nvSpPr>
+          <p:cNvPr id="3" name="Notes Placeholder 2"/>
+          <p:cNvSpPr>
+            <a:spLocks noGrp="1"/>
+          </p:cNvSpPr>
+          <p:nvPr>
+            <p:ph type="body" idx="3" sz="quarter"/>
+          </p:nvPr>
+        </p:nvSpPr>
+        <p:spPr/>
+        <p:txBody>
+          <a:bodyPr/>
+          <a:lstStyle/>
+          <a:p>
+            <a:r>
+              <a:t>VA09 ist das Abschlussmodul – kurzer Rückblick auf den Track und Ausblick auf den Co-Pilot-Selbstcheck. Transfer: Sec 5.1.</a:t>
+            </a:r>
+          </a:p>
+        </p:txBody>
+      </p:sp>
+      <p:sp>
+        <p:nvSpPr>
+          <p:cNvPr id="4" name="Slide Number Placeholder 3"/>
+          <p:cNvSpPr>
+            <a:spLocks noGrp="1"/>
+          </p:cNvSpPr>
+          <p:nvPr>
+            <p:ph type="sldNum" idx="5" sz="quarter"/>
+          </p:nvPr>
+        </p:nvSpPr>
+        <p:spPr/>
+      </p:sp>
+    </p:spTree>
+  </p:cSld>
+  <p:clrMapOvr>
+    <a:masterClrMapping/>
+  </p:clrMapOvr>
+</p:notes>
+</file>
+
+<file path=ppt/notesSlides/notesSlide9.xml><?xml version="1.0" encoding="utf-8"?>
+<p:notes xmlns:a="http://schemas.openxmlformats.org/drawingml/2006/main" xmlns:p="http://schemas.openxmlformats.org/presentationml/2006/main" xmlns:r="http://schemas.openxmlformats.org/officeDocument/2006/relationships">
+  <p:cSld>
+    <p:spTree>
+      <p:nvGrpSpPr>
+        <p:cNvPr id="1" name=""/>
+        <p:cNvGrpSpPr/>
+        <p:nvPr/>
+      </p:nvGrpSpPr>
+      <p:grpSpPr>
+        <a:xfrm>
+          <a:off x="0" y="0"/>
+          <a:ext cx="0" cy="0"/>
+          <a:chOff x="0" y="0"/>
+          <a:chExt cx="0" cy="0"/>
+        </a:xfrm>
+      </p:grpSpPr>
+      <p:sp>
+        <p:nvSpPr>
+          <p:cNvPr id="2" name="Slide Image Placeholder 1"/>
+          <p:cNvSpPr>
+            <a:spLocks noGrp="1"/>
+          </p:cNvSpPr>
+          <p:nvPr>
+            <p:ph type="sldImg" idx="2"/>
+          </p:nvPr>
+        </p:nvSpPr>
+        <p:spPr/>
+      </p:sp>
+      <p:sp>
+        <p:nvSpPr>
+          <p:cNvPr id="3" name="Notes Placeholder 2"/>
+          <p:cNvSpPr>
+            <a:spLocks noGrp="1"/>
+          </p:cNvSpPr>
+          <p:nvPr>
+            <p:ph type="body" idx="3" sz="quarter"/>
+          </p:nvPr>
+        </p:nvSpPr>
+        <p:spPr/>
+        <p:txBody>
+          <a:bodyPr/>
+          <a:lstStyle/>
+          <a:p>
+            <a:r>
+              <a:t>Fragen 1 und 3 je 3 Min. Karte „Vom Signal zum Anlass" (AB-5) übergeben.</a:t>
             </a:r>
           </a:p>
         </p:txBody>
@@ -4376,6 +4658,2829 @@
 </p:sld>
 </file>
 
+<file path=ppt/slides/slide10.xml><?xml version="1.0" encoding="utf-8"?>
+<p:sld xmlns:a="http://schemas.openxmlformats.org/drawingml/2006/main" xmlns:p="http://schemas.openxmlformats.org/presentationml/2006/main" xmlns:r="http://schemas.openxmlformats.org/officeDocument/2006/relationships">
+  <p:cSld>
+    <p:spTree>
+      <p:nvGrpSpPr>
+        <p:cNvPr id="1" name=""/>
+        <p:cNvGrpSpPr/>
+        <p:nvPr/>
+      </p:nvGrpSpPr>
+      <p:grpSpPr/>
+      <p:sp>
+        <p:nvSpPr>
+          <p:cNvPr id="2" name="Rectangle 1"/>
+          <p:cNvSpPr/>
+          <p:nvPr/>
+        </p:nvSpPr>
+        <p:spPr>
+          <a:xfrm>
+            <a:off x="0" y="0"/>
+            <a:ext cx="12188952" cy="6858000"/>
+          </a:xfrm>
+          <a:prstGeom prst="rect">
+            <a:avLst/>
+          </a:prstGeom>
+          <a:solidFill>
+            <a:srgbClr val="FFFFFF"/>
+          </a:solidFill>
+          <a:ln>
+            <a:noFill/>
+          </a:ln>
+        </p:spPr>
+        <p:style>
+          <a:lnRef idx="1">
+            <a:schemeClr val="accent1"/>
+          </a:lnRef>
+          <a:fillRef idx="3">
+            <a:schemeClr val="accent1"/>
+          </a:fillRef>
+          <a:effectRef idx="2">
+            <a:schemeClr val="accent1"/>
+          </a:effectRef>
+          <a:fontRef idx="minor">
+            <a:schemeClr val="lt1"/>
+          </a:fontRef>
+        </p:style>
+        <p:txBody>
+          <a:bodyPr rtlCol="0" anchor="ctr"/>
+          <a:lstStyle/>
+          <a:p>
+            <a:pPr algn="ctr"/>
+          </a:p>
+        </p:txBody>
+      </p:sp>
+      <p:sp>
+        <p:nvSpPr>
+          <p:cNvPr id="3" name="Rectangle 2"/>
+          <p:cNvSpPr/>
+          <p:nvPr/>
+        </p:nvSpPr>
+        <p:spPr>
+          <a:xfrm>
+            <a:off x="0" y="0"/>
+            <a:ext cx="12188952" cy="50292"/>
+          </a:xfrm>
+          <a:prstGeom prst="rect">
+            <a:avLst/>
+          </a:prstGeom>
+          <a:solidFill>
+            <a:srgbClr val="1F2C56"/>
+          </a:solidFill>
+          <a:ln>
+            <a:noFill/>
+          </a:ln>
+        </p:spPr>
+        <p:style>
+          <a:lnRef idx="1">
+            <a:schemeClr val="accent1"/>
+          </a:lnRef>
+          <a:fillRef idx="3">
+            <a:schemeClr val="accent1"/>
+          </a:fillRef>
+          <a:effectRef idx="2">
+            <a:schemeClr val="accent1"/>
+          </a:effectRef>
+          <a:fontRef idx="minor">
+            <a:schemeClr val="lt1"/>
+          </a:fontRef>
+        </p:style>
+        <p:txBody>
+          <a:bodyPr rtlCol="0" anchor="ctr"/>
+          <a:lstStyle/>
+          <a:p>
+            <a:pPr algn="ctr"/>
+          </a:p>
+        </p:txBody>
+      </p:sp>
+      <p:sp>
+        <p:nvSpPr>
+          <p:cNvPr id="4" name="TextBox 3"/>
+          <p:cNvSpPr txBox="1"/>
+          <p:nvPr/>
+        </p:nvSpPr>
+        <p:spPr>
+          <a:xfrm>
+            <a:off x="685800" y="109728"/>
+            <a:ext cx="10817352" cy="228600"/>
+          </a:xfrm>
+          <a:prstGeom prst="rect">
+            <a:avLst/>
+          </a:prstGeom>
+          <a:noFill/>
+        </p:spPr>
+        <p:txBody>
+          <a:bodyPr wrap="none">
+            <a:spAutoFit/>
+          </a:bodyPr>
+          <a:lstStyle/>
+          <a:p>
+            <a:pPr algn="l"/>
+            <a:r>
+              <a:rPr sz="750">
+                <a:solidFill>
+                  <a:srgbClr val="78808C"/>
+                </a:solidFill>
+                <a:latin typeface="Consolas"/>
+              </a:rPr>
+              <a:t>VA09  ·  SCHAUBILD</a:t>
+            </a:r>
+          </a:p>
+        </p:txBody>
+      </p:sp>
+      <p:sp>
+        <p:nvSpPr>
+          <p:cNvPr id="5" name="TextBox 4"/>
+          <p:cNvSpPr txBox="1"/>
+          <p:nvPr/>
+        </p:nvSpPr>
+        <p:spPr>
+          <a:xfrm>
+            <a:off x="685800" y="502920"/>
+            <a:ext cx="10817352" cy="594360"/>
+          </a:xfrm>
+          <a:prstGeom prst="rect">
+            <a:avLst/>
+          </a:prstGeom>
+          <a:noFill/>
+        </p:spPr>
+        <p:txBody>
+          <a:bodyPr wrap="square">
+            <a:spAutoFit/>
+          </a:bodyPr>
+          <a:lstStyle/>
+          <a:p>
+            <a:pPr algn="l"/>
+            <a:r>
+              <a:rPr sz="2000" b="1" i="0">
+                <a:solidFill>
+                  <a:srgbClr val="1F2C56"/>
+                </a:solidFill>
+                <a:latin typeface="Arial"/>
+              </a:rPr>
+              <a:t>Signal oder Rauschen?</a:t>
+            </a:r>
+          </a:p>
+        </p:txBody>
+      </p:sp>
+      <p:sp>
+        <p:nvSpPr>
+          <p:cNvPr id="6" name="Rectangle 5"/>
+          <p:cNvSpPr/>
+          <p:nvPr/>
+        </p:nvSpPr>
+        <p:spPr>
+          <a:xfrm>
+            <a:off x="685800" y="1143000"/>
+            <a:ext cx="10817352" cy="25400"/>
+          </a:xfrm>
+          <a:prstGeom prst="rect">
+            <a:avLst/>
+          </a:prstGeom>
+          <a:solidFill>
+            <a:srgbClr val="D9C089"/>
+          </a:solidFill>
+          <a:ln>
+            <a:noFill/>
+          </a:ln>
+        </p:spPr>
+        <p:style>
+          <a:lnRef idx="1">
+            <a:schemeClr val="accent1"/>
+          </a:lnRef>
+          <a:fillRef idx="3">
+            <a:schemeClr val="accent1"/>
+          </a:fillRef>
+          <a:effectRef idx="2">
+            <a:schemeClr val="accent1"/>
+          </a:effectRef>
+          <a:fontRef idx="minor">
+            <a:schemeClr val="lt1"/>
+          </a:fontRef>
+        </p:style>
+        <p:txBody>
+          <a:bodyPr rtlCol="0" anchor="ctr"/>
+          <a:lstStyle/>
+          <a:p>
+            <a:pPr algn="ctr"/>
+          </a:p>
+        </p:txBody>
+      </p:sp>
+      <p:pic>
+        <p:nvPicPr>
+          <p:cNvPr id="7" name="Picture 6" descr="image.png"/>
+          <p:cNvPicPr>
+            <a:picLocks noChangeAspect="1"/>
+          </p:cNvPicPr>
+          <p:nvPr/>
+        </p:nvPicPr>
+        <p:blipFill>
+          <a:blip r:embed="rId2"/>
+          <a:stretch>
+            <a:fillRect/>
+          </a:stretch>
+        </p:blipFill>
+        <p:spPr>
+          <a:xfrm>
+            <a:off x="2009463" y="1325880"/>
+            <a:ext cx="8170026" cy="4937760"/>
+          </a:xfrm>
+          <a:prstGeom prst="rect">
+            <a:avLst/>
+          </a:prstGeom>
+        </p:spPr>
+      </p:pic>
+      <p:sp>
+        <p:nvSpPr>
+          <p:cNvPr id="8" name="Rectangle 7"/>
+          <p:cNvSpPr/>
+          <p:nvPr/>
+        </p:nvSpPr>
+        <p:spPr>
+          <a:xfrm>
+            <a:off x="0" y="6510528"/>
+            <a:ext cx="12188952" cy="347472"/>
+          </a:xfrm>
+          <a:prstGeom prst="rect">
+            <a:avLst/>
+          </a:prstGeom>
+          <a:solidFill>
+            <a:srgbClr val="0A1937"/>
+          </a:solidFill>
+          <a:ln>
+            <a:noFill/>
+          </a:ln>
+        </p:spPr>
+        <p:style>
+          <a:lnRef idx="1">
+            <a:schemeClr val="accent1"/>
+          </a:lnRef>
+          <a:fillRef idx="3">
+            <a:schemeClr val="accent1"/>
+          </a:fillRef>
+          <a:effectRef idx="2">
+            <a:schemeClr val="accent1"/>
+          </a:effectRef>
+          <a:fontRef idx="minor">
+            <a:schemeClr val="lt1"/>
+          </a:fontRef>
+        </p:style>
+        <p:txBody>
+          <a:bodyPr rtlCol="0" anchor="ctr"/>
+          <a:lstStyle/>
+          <a:p>
+            <a:pPr algn="ctr"/>
+          </a:p>
+        </p:txBody>
+      </p:sp>
+      <p:sp>
+        <p:nvSpPr>
+          <p:cNvPr id="9" name="TextBox 8"/>
+          <p:cNvSpPr txBox="1"/>
+          <p:nvPr/>
+        </p:nvSpPr>
+        <p:spPr>
+          <a:xfrm>
+            <a:off x="685800" y="6583680"/>
+            <a:ext cx="6490411" cy="256032"/>
+          </a:xfrm>
+          <a:prstGeom prst="rect">
+            <a:avLst/>
+          </a:prstGeom>
+          <a:noFill/>
+        </p:spPr>
+        <p:txBody>
+          <a:bodyPr wrap="none">
+            <a:spAutoFit/>
+          </a:bodyPr>
+          <a:lstStyle/>
+          <a:p>
+            <a:pPr algn="l"/>
+            <a:r>
+              <a:rPr sz="700">
+                <a:solidFill>
+                  <a:srgbClr val="A0B4D2"/>
+                </a:solidFill>
+                <a:latin typeface="Consolas"/>
+              </a:rPr>
+              <a:t>FKB Campus  ·  VA09</a:t>
+            </a:r>
+          </a:p>
+        </p:txBody>
+      </p:sp>
+      <p:sp>
+        <p:nvSpPr>
+          <p:cNvPr id="10" name="TextBox 9"/>
+          <p:cNvSpPr txBox="1"/>
+          <p:nvPr/>
+        </p:nvSpPr>
+        <p:spPr>
+          <a:xfrm>
+            <a:off x="7176211" y="6583680"/>
+            <a:ext cx="4326940" cy="256032"/>
+          </a:xfrm>
+          <a:prstGeom prst="rect">
+            <a:avLst/>
+          </a:prstGeom>
+          <a:noFill/>
+        </p:spPr>
+        <p:txBody>
+          <a:bodyPr wrap="none">
+            <a:spAutoFit/>
+          </a:bodyPr>
+          <a:lstStyle/>
+          <a:p>
+            <a:pPr algn="r"/>
+            <a:r>
+              <a:rPr sz="700">
+                <a:solidFill>
+                  <a:srgbClr val="A0B4D2"/>
+                </a:solidFill>
+                <a:latin typeface="Consolas"/>
+              </a:rPr>
+              <a:t>Schaubild</a:t>
+            </a:r>
+          </a:p>
+        </p:txBody>
+      </p:sp>
+    </p:spTree>
+  </p:cSld>
+  <p:clrMapOvr>
+    <a:masterClrMapping/>
+  </p:clrMapOvr>
+</p:sld>
+</file>
+
+<file path=ppt/slides/slide11.xml><?xml version="1.0" encoding="utf-8"?>
+<p:sld xmlns:a="http://schemas.openxmlformats.org/drawingml/2006/main" xmlns:p="http://schemas.openxmlformats.org/presentationml/2006/main" xmlns:r="http://schemas.openxmlformats.org/officeDocument/2006/relationships">
+  <p:cSld>
+    <p:spTree>
+      <p:nvGrpSpPr>
+        <p:cNvPr id="1" name=""/>
+        <p:cNvGrpSpPr/>
+        <p:nvPr/>
+      </p:nvGrpSpPr>
+      <p:grpSpPr/>
+      <p:sp>
+        <p:nvSpPr>
+          <p:cNvPr id="2" name="Rectangle 1"/>
+          <p:cNvSpPr/>
+          <p:nvPr/>
+        </p:nvSpPr>
+        <p:spPr>
+          <a:xfrm>
+            <a:off x="0" y="0"/>
+            <a:ext cx="12188952" cy="6858000"/>
+          </a:xfrm>
+          <a:prstGeom prst="rect">
+            <a:avLst/>
+          </a:prstGeom>
+          <a:solidFill>
+            <a:srgbClr val="1F2C56"/>
+          </a:solidFill>
+          <a:ln>
+            <a:noFill/>
+          </a:ln>
+        </p:spPr>
+        <p:style>
+          <a:lnRef idx="1">
+            <a:schemeClr val="accent1"/>
+          </a:lnRef>
+          <a:fillRef idx="3">
+            <a:schemeClr val="accent1"/>
+          </a:fillRef>
+          <a:effectRef idx="2">
+            <a:schemeClr val="accent1"/>
+          </a:effectRef>
+          <a:fontRef idx="minor">
+            <a:schemeClr val="lt1"/>
+          </a:fontRef>
+        </p:style>
+        <p:txBody>
+          <a:bodyPr rtlCol="0" anchor="ctr"/>
+          <a:lstStyle/>
+          <a:p>
+            <a:pPr algn="ctr"/>
+          </a:p>
+        </p:txBody>
+      </p:sp>
+      <p:sp>
+        <p:nvSpPr>
+          <p:cNvPr id="3" name="TextBox 2"/>
+          <p:cNvSpPr txBox="1"/>
+          <p:nvPr/>
+        </p:nvSpPr>
+        <p:spPr>
+          <a:xfrm>
+            <a:off x="685800" y="2377440"/>
+            <a:ext cx="10817352" cy="365760"/>
+          </a:xfrm>
+          <a:prstGeom prst="rect">
+            <a:avLst/>
+          </a:prstGeom>
+          <a:noFill/>
+        </p:spPr>
+        <p:txBody>
+          <a:bodyPr wrap="none">
+            <a:spAutoFit/>
+          </a:bodyPr>
+          <a:lstStyle/>
+          <a:p>
+            <a:pPr algn="l"/>
+            <a:r>
+              <a:rPr sz="1200">
+                <a:solidFill>
+                  <a:srgbClr val="D9C089"/>
+                </a:solidFill>
+                <a:latin typeface="Consolas"/>
+              </a:rPr>
+              <a:t>00:35–01:15</a:t>
+            </a:r>
+          </a:p>
+        </p:txBody>
+      </p:sp>
+      <p:sp>
+        <p:nvSpPr>
+          <p:cNvPr id="4" name="Rectangle 3"/>
+          <p:cNvSpPr/>
+          <p:nvPr/>
+        </p:nvSpPr>
+        <p:spPr>
+          <a:xfrm>
+            <a:off x="685800" y="2788920"/>
+            <a:ext cx="548640" cy="38100"/>
+          </a:xfrm>
+          <a:prstGeom prst="rect">
+            <a:avLst/>
+          </a:prstGeom>
+          <a:solidFill>
+            <a:srgbClr val="D9C089"/>
+          </a:solidFill>
+          <a:ln>
+            <a:noFill/>
+          </a:ln>
+        </p:spPr>
+        <p:style>
+          <a:lnRef idx="1">
+            <a:schemeClr val="accent1"/>
+          </a:lnRef>
+          <a:fillRef idx="3">
+            <a:schemeClr val="accent1"/>
+          </a:fillRef>
+          <a:effectRef idx="2">
+            <a:schemeClr val="accent1"/>
+          </a:effectRef>
+          <a:fontRef idx="minor">
+            <a:schemeClr val="lt1"/>
+          </a:fontRef>
+        </p:style>
+        <p:txBody>
+          <a:bodyPr rtlCol="0" anchor="ctr"/>
+          <a:lstStyle/>
+          <a:p>
+            <a:pPr algn="ctr"/>
+          </a:p>
+        </p:txBody>
+      </p:sp>
+      <p:sp>
+        <p:nvSpPr>
+          <p:cNvPr id="5" name="TextBox 4"/>
+          <p:cNvSpPr txBox="1"/>
+          <p:nvPr/>
+        </p:nvSpPr>
+        <p:spPr>
+          <a:xfrm>
+            <a:off x="685800" y="3017520"/>
+            <a:ext cx="10817352" cy="1463040"/>
+          </a:xfrm>
+          <a:prstGeom prst="rect">
+            <a:avLst/>
+          </a:prstGeom>
+          <a:noFill/>
+        </p:spPr>
+        <p:txBody>
+          <a:bodyPr wrap="square">
+            <a:spAutoFit/>
+          </a:bodyPr>
+          <a:lstStyle/>
+          <a:p>
+            <a:pPr algn="l"/>
+            <a:r>
+              <a:rPr sz="4000" b="1" i="0">
+                <a:solidFill>
+                  <a:srgbClr val="FFFFFF"/>
+                </a:solidFill>
+                <a:latin typeface="Arial"/>
+              </a:rPr>
+              <a:t>Fallübergabe &amp; Fallarbeit</a:t>
+            </a:r>
+          </a:p>
+        </p:txBody>
+      </p:sp>
+      <p:sp>
+        <p:nvSpPr>
+          <p:cNvPr id="6" name="TextBox 5"/>
+          <p:cNvSpPr txBox="1"/>
+          <p:nvPr/>
+        </p:nvSpPr>
+        <p:spPr>
+          <a:xfrm>
+            <a:off x="685800" y="4480560"/>
+            <a:ext cx="8653881" cy="1280160"/>
+          </a:xfrm>
+          <a:prstGeom prst="rect">
+            <a:avLst/>
+          </a:prstGeom>
+          <a:noFill/>
+        </p:spPr>
+        <p:txBody>
+          <a:bodyPr wrap="square">
+            <a:spAutoFit/>
+          </a:bodyPr>
+          <a:lstStyle/>
+          <a:p>
+            <a:pPr algn="l"/>
+            <a:r>
+              <a:rPr sz="1600" b="0" i="0">
+                <a:solidFill>
+                  <a:srgbClr val="C8D2E6"/>
+                </a:solidFill>
+                <a:latin typeface="Arial"/>
+              </a:rPr>
+              <a:t>Vier Kundenprofile screenen – drei entscheidungsreife Anlässe statt dreißig vager.</a:t>
+            </a:r>
+          </a:p>
+        </p:txBody>
+      </p:sp>
+      <p:sp>
+        <p:nvSpPr>
+          <p:cNvPr id="7" name="TextBox 6"/>
+          <p:cNvSpPr txBox="1"/>
+          <p:nvPr/>
+        </p:nvSpPr>
+        <p:spPr>
+          <a:xfrm>
+            <a:off x="685800" y="6355080"/>
+            <a:ext cx="10817352" cy="274320"/>
+          </a:xfrm>
+          <a:prstGeom prst="rect">
+            <a:avLst/>
+          </a:prstGeom>
+          <a:noFill/>
+        </p:spPr>
+        <p:txBody>
+          <a:bodyPr wrap="none">
+            <a:spAutoFit/>
+          </a:bodyPr>
+          <a:lstStyle/>
+          <a:p>
+            <a:pPr algn="l"/>
+            <a:r>
+              <a:rPr sz="700">
+                <a:solidFill>
+                  <a:srgbClr val="8CA0C3"/>
+                </a:solidFill>
+                <a:latin typeface="Consolas"/>
+              </a:rPr>
+              <a:t>FKB Campus  ·  VA09</a:t>
+            </a:r>
+          </a:p>
+        </p:txBody>
+      </p:sp>
+    </p:spTree>
+  </p:cSld>
+  <p:clrMapOvr>
+    <a:masterClrMapping/>
+  </p:clrMapOvr>
+</p:sld>
+</file>
+
+<file path=ppt/slides/slide12.xml><?xml version="1.0" encoding="utf-8"?>
+<p:sld xmlns:a="http://schemas.openxmlformats.org/drawingml/2006/main" xmlns:p="http://schemas.openxmlformats.org/presentationml/2006/main" xmlns:r="http://schemas.openxmlformats.org/officeDocument/2006/relationships">
+  <p:cSld>
+    <p:spTree>
+      <p:nvGrpSpPr>
+        <p:cNvPr id="1" name=""/>
+        <p:cNvGrpSpPr/>
+        <p:nvPr/>
+      </p:nvGrpSpPr>
+      <p:grpSpPr/>
+      <p:sp>
+        <p:nvSpPr>
+          <p:cNvPr id="2" name="Rectangle 1"/>
+          <p:cNvSpPr/>
+          <p:nvPr/>
+        </p:nvSpPr>
+        <p:spPr>
+          <a:xfrm>
+            <a:off x="0" y="0"/>
+            <a:ext cx="12188952" cy="6858000"/>
+          </a:xfrm>
+          <a:prstGeom prst="rect">
+            <a:avLst/>
+          </a:prstGeom>
+          <a:solidFill>
+            <a:srgbClr val="EDEDF3"/>
+          </a:solidFill>
+          <a:ln>
+            <a:noFill/>
+          </a:ln>
+        </p:spPr>
+        <p:style>
+          <a:lnRef idx="1">
+            <a:schemeClr val="accent1"/>
+          </a:lnRef>
+          <a:fillRef idx="3">
+            <a:schemeClr val="accent1"/>
+          </a:fillRef>
+          <a:effectRef idx="2">
+            <a:schemeClr val="accent1"/>
+          </a:effectRef>
+          <a:fontRef idx="minor">
+            <a:schemeClr val="lt1"/>
+          </a:fontRef>
+        </p:style>
+        <p:txBody>
+          <a:bodyPr rtlCol="0" anchor="ctr"/>
+          <a:lstStyle/>
+          <a:p>
+            <a:pPr algn="ctr"/>
+          </a:p>
+        </p:txBody>
+      </p:sp>
+      <p:sp>
+        <p:nvSpPr>
+          <p:cNvPr id="3" name="Rectangle 2"/>
+          <p:cNvSpPr/>
+          <p:nvPr/>
+        </p:nvSpPr>
+        <p:spPr>
+          <a:xfrm>
+            <a:off x="0" y="0"/>
+            <a:ext cx="12188952" cy="50292"/>
+          </a:xfrm>
+          <a:prstGeom prst="rect">
+            <a:avLst/>
+          </a:prstGeom>
+          <a:solidFill>
+            <a:srgbClr val="1F2C56"/>
+          </a:solidFill>
+          <a:ln>
+            <a:noFill/>
+          </a:ln>
+        </p:spPr>
+        <p:style>
+          <a:lnRef idx="1">
+            <a:schemeClr val="accent1"/>
+          </a:lnRef>
+          <a:fillRef idx="3">
+            <a:schemeClr val="accent1"/>
+          </a:fillRef>
+          <a:effectRef idx="2">
+            <a:schemeClr val="accent1"/>
+          </a:effectRef>
+          <a:fontRef idx="minor">
+            <a:schemeClr val="lt1"/>
+          </a:fontRef>
+        </p:style>
+        <p:txBody>
+          <a:bodyPr rtlCol="0" anchor="ctr"/>
+          <a:lstStyle/>
+          <a:p>
+            <a:pPr algn="ctr"/>
+          </a:p>
+        </p:txBody>
+      </p:sp>
+      <p:sp>
+        <p:nvSpPr>
+          <p:cNvPr id="4" name="TextBox 3"/>
+          <p:cNvSpPr txBox="1"/>
+          <p:nvPr/>
+        </p:nvSpPr>
+        <p:spPr>
+          <a:xfrm>
+            <a:off x="685800" y="109728"/>
+            <a:ext cx="10817352" cy="228600"/>
+          </a:xfrm>
+          <a:prstGeom prst="rect">
+            <a:avLst/>
+          </a:prstGeom>
+          <a:noFill/>
+        </p:spPr>
+        <p:txBody>
+          <a:bodyPr wrap="none">
+            <a:spAutoFit/>
+          </a:bodyPr>
+          <a:lstStyle/>
+          <a:p>
+            <a:pPr algn="l"/>
+            <a:r>
+              <a:rPr sz="750">
+                <a:solidFill>
+                  <a:srgbClr val="78808C"/>
+                </a:solidFill>
+                <a:latin typeface="Consolas"/>
+              </a:rPr>
+              <a:t>VA09  ·  INHALT</a:t>
+            </a:r>
+          </a:p>
+        </p:txBody>
+      </p:sp>
+      <p:sp>
+        <p:nvSpPr>
+          <p:cNvPr id="5" name="Rectangle 4"/>
+          <p:cNvSpPr/>
+          <p:nvPr/>
+        </p:nvSpPr>
+        <p:spPr>
+          <a:xfrm>
+            <a:off x="0" y="1234440"/>
+            <a:ext cx="12188952" cy="12700"/>
+          </a:xfrm>
+          <a:prstGeom prst="rect">
+            <a:avLst/>
+          </a:prstGeom>
+          <a:solidFill>
+            <a:srgbClr val="D8DFE4"/>
+          </a:solidFill>
+          <a:ln>
+            <a:noFill/>
+          </a:ln>
+        </p:spPr>
+        <p:style>
+          <a:lnRef idx="1">
+            <a:schemeClr val="accent1"/>
+          </a:lnRef>
+          <a:fillRef idx="3">
+            <a:schemeClr val="accent1"/>
+          </a:fillRef>
+          <a:effectRef idx="2">
+            <a:schemeClr val="accent1"/>
+          </a:effectRef>
+          <a:fontRef idx="minor">
+            <a:schemeClr val="lt1"/>
+          </a:fontRef>
+        </p:style>
+        <p:txBody>
+          <a:bodyPr rtlCol="0" anchor="ctr"/>
+          <a:lstStyle/>
+          <a:p>
+            <a:pPr algn="ctr"/>
+          </a:p>
+        </p:txBody>
+      </p:sp>
+      <p:sp>
+        <p:nvSpPr>
+          <p:cNvPr id="6" name="Rectangle 5"/>
+          <p:cNvSpPr/>
+          <p:nvPr/>
+        </p:nvSpPr>
+        <p:spPr>
+          <a:xfrm>
+            <a:off x="685800" y="502920"/>
+            <a:ext cx="36576" cy="658368"/>
+          </a:xfrm>
+          <a:prstGeom prst="rect">
+            <a:avLst/>
+          </a:prstGeom>
+          <a:solidFill>
+            <a:srgbClr val="D9C089"/>
+          </a:solidFill>
+          <a:ln>
+            <a:noFill/>
+          </a:ln>
+        </p:spPr>
+        <p:style>
+          <a:lnRef idx="1">
+            <a:schemeClr val="accent1"/>
+          </a:lnRef>
+          <a:fillRef idx="3">
+            <a:schemeClr val="accent1"/>
+          </a:fillRef>
+          <a:effectRef idx="2">
+            <a:schemeClr val="accent1"/>
+          </a:effectRef>
+          <a:fontRef idx="minor">
+            <a:schemeClr val="lt1"/>
+          </a:fontRef>
+        </p:style>
+        <p:txBody>
+          <a:bodyPr rtlCol="0" anchor="ctr"/>
+          <a:lstStyle/>
+          <a:p>
+            <a:pPr algn="ctr"/>
+          </a:p>
+        </p:txBody>
+      </p:sp>
+      <p:sp>
+        <p:nvSpPr>
+          <p:cNvPr id="7" name="TextBox 6"/>
+          <p:cNvSpPr txBox="1"/>
+          <p:nvPr/>
+        </p:nvSpPr>
+        <p:spPr>
+          <a:xfrm>
+            <a:off x="813816" y="502920"/>
+            <a:ext cx="10634472" cy="685800"/>
+          </a:xfrm>
+          <a:prstGeom prst="rect">
+            <a:avLst/>
+          </a:prstGeom>
+          <a:noFill/>
+        </p:spPr>
+        <p:txBody>
+          <a:bodyPr wrap="square">
+            <a:spAutoFit/>
+          </a:bodyPr>
+          <a:lstStyle/>
+          <a:p>
+            <a:pPr algn="l"/>
+            <a:r>
+              <a:rPr sz="2400" b="1" i="0">
+                <a:solidFill>
+                  <a:srgbClr val="1F2C56"/>
+                </a:solidFill>
+                <a:latin typeface="Arial"/>
+              </a:rPr>
+              <a:t>Praxisfall: Anlass-Screening im Portfolio</a:t>
+            </a:r>
+          </a:p>
+        </p:txBody>
+      </p:sp>
+      <p:sp>
+        <p:nvSpPr>
+          <p:cNvPr id="8" name="TextBox 7"/>
+          <p:cNvSpPr txBox="1"/>
+          <p:nvPr/>
+        </p:nvSpPr>
+        <p:spPr>
+          <a:xfrm>
+            <a:off x="685800" y="1417320"/>
+            <a:ext cx="10817352" cy="4892040"/>
+          </a:xfrm>
+          <a:prstGeom prst="rect">
+            <a:avLst/>
+          </a:prstGeom>
+          <a:noFill/>
+        </p:spPr>
+        <p:txBody>
+          <a:bodyPr wrap="square">
+            <a:spAutoFit/>
+          </a:bodyPr>
+          <a:lstStyle/>
+          <a:p>
+            <a:pPr>
+              <a:spcBef>
+                <a:spcPts val="1000"/>
+              </a:spcBef>
+              <a:spcAft>
+                <a:spcPts val="200"/>
+              </a:spcAft>
+            </a:pPr>
+            <a:r>
+              <a:rPr sz="800" b="1">
+                <a:solidFill>
+                  <a:srgbClr val="78808C"/>
+                </a:solidFill>
+                <a:latin typeface="Consolas"/>
+              </a:rPr>
+              <a:t>VIER KUNDENPROFILE AUF IHREM TISCH</a:t>
+            </a:r>
+          </a:p>
+          <a:p>
+            <a:pPr marL="190500" indent="-190500">
+              <a:spcBef>
+                <a:spcPts val="400"/>
+              </a:spcBef>
+              <a:spcAft>
+                <a:spcPts val="200"/>
+              </a:spcAft>
+            </a:pPr>
+            <a:r>
+              <a:rPr sz="1300">
+                <a:solidFill>
+                  <a:srgbClr val="3D5466"/>
+                </a:solidFill>
+                <a:latin typeface="Arial"/>
+              </a:rPr>
+              <a:t>▸  Stahlbau Musterregion GmbH: Inhaber 63, keine Nachfolge dokumentiert.</a:t>
+            </a:r>
+          </a:p>
+          <a:p>
+            <a:pPr marL="190500" indent="-190500">
+              <a:spcBef>
+                <a:spcPts val="400"/>
+              </a:spcBef>
+              <a:spcAft>
+                <a:spcPts val="200"/>
+              </a:spcAft>
+            </a:pPr>
+            <a:r>
+              <a:rPr sz="1300">
+                <a:solidFill>
+                  <a:srgbClr val="3D5466"/>
+                </a:solidFill>
+                <a:latin typeface="Arial"/>
+              </a:rPr>
+              <a:t>▸  Gastro Musterregion GmbH: einmalige hohe Zahlung im Dezember (saisonales Weihnachtsgeschäft).</a:t>
+            </a:r>
+          </a:p>
+          <a:p>
+            <a:pPr marL="190500" indent="-190500">
+              <a:spcBef>
+                <a:spcPts val="400"/>
+              </a:spcBef>
+              <a:spcAft>
+                <a:spcPts val="200"/>
+              </a:spcAft>
+            </a:pPr>
+            <a:r>
+              <a:rPr sz="1300">
+                <a:solidFill>
+                  <a:srgbClr val="3D5466"/>
+                </a:solidFill>
+                <a:latin typeface="Arial"/>
+              </a:rPr>
+              <a:t>▸  Weitere Profile mit ausgelasteter Linie bzw. ungenutzter Liquidität.</a:t>
+            </a:r>
+          </a:p>
+          <a:p>
+            <a:pPr>
+              <a:spcBef>
+                <a:spcPts val="1000"/>
+              </a:spcBef>
+              <a:spcAft>
+                <a:spcPts val="200"/>
+              </a:spcAft>
+            </a:pPr>
+            <a:r>
+              <a:rPr sz="800" b="1">
+                <a:solidFill>
+                  <a:srgbClr val="78808C"/>
+                </a:solidFill>
+                <a:latin typeface="Consolas"/>
+              </a:rPr>
+              <a:t>IHRE AUFGABE</a:t>
+            </a:r>
+          </a:p>
+          <a:p>
+            <a:pPr marL="190500" indent="-190500">
+              <a:spcBef>
+                <a:spcPts val="400"/>
+              </a:spcBef>
+              <a:spcAft>
+                <a:spcPts val="200"/>
+              </a:spcAft>
+            </a:pPr>
+            <a:r>
+              <a:rPr sz="1300">
+                <a:solidFill>
+                  <a:srgbClr val="3D5466"/>
+                </a:solidFill>
+                <a:latin typeface="Arial"/>
+              </a:rPr>
+              <a:t>▸  Screenen Sie auf Anlässe, bewerten Sie die Relevanz und bereiten Sie den stärksten Anlass entscheidungsreif auf.</a:t>
+            </a:r>
+          </a:p>
+        </p:txBody>
+      </p:sp>
+      <p:sp>
+        <p:nvSpPr>
+          <p:cNvPr id="9" name="Rectangle 8"/>
+          <p:cNvSpPr/>
+          <p:nvPr/>
+        </p:nvSpPr>
+        <p:spPr>
+          <a:xfrm>
+            <a:off x="0" y="6510528"/>
+            <a:ext cx="12188952" cy="347472"/>
+          </a:xfrm>
+          <a:prstGeom prst="rect">
+            <a:avLst/>
+          </a:prstGeom>
+          <a:solidFill>
+            <a:srgbClr val="0A1937"/>
+          </a:solidFill>
+          <a:ln>
+            <a:noFill/>
+          </a:ln>
+        </p:spPr>
+        <p:style>
+          <a:lnRef idx="1">
+            <a:schemeClr val="accent1"/>
+          </a:lnRef>
+          <a:fillRef idx="3">
+            <a:schemeClr val="accent1"/>
+          </a:fillRef>
+          <a:effectRef idx="2">
+            <a:schemeClr val="accent1"/>
+          </a:effectRef>
+          <a:fontRef idx="minor">
+            <a:schemeClr val="lt1"/>
+          </a:fontRef>
+        </p:style>
+        <p:txBody>
+          <a:bodyPr rtlCol="0" anchor="ctr"/>
+          <a:lstStyle/>
+          <a:p>
+            <a:pPr algn="ctr"/>
+          </a:p>
+        </p:txBody>
+      </p:sp>
+      <p:sp>
+        <p:nvSpPr>
+          <p:cNvPr id="10" name="TextBox 9"/>
+          <p:cNvSpPr txBox="1"/>
+          <p:nvPr/>
+        </p:nvSpPr>
+        <p:spPr>
+          <a:xfrm>
+            <a:off x="685800" y="6583680"/>
+            <a:ext cx="6490411" cy="256032"/>
+          </a:xfrm>
+          <a:prstGeom prst="rect">
+            <a:avLst/>
+          </a:prstGeom>
+          <a:noFill/>
+        </p:spPr>
+        <p:txBody>
+          <a:bodyPr wrap="none">
+            <a:spAutoFit/>
+          </a:bodyPr>
+          <a:lstStyle/>
+          <a:p>
+            <a:pPr algn="l"/>
+            <a:r>
+              <a:rPr sz="700">
+                <a:solidFill>
+                  <a:srgbClr val="A0B4D2"/>
+                </a:solidFill>
+                <a:latin typeface="Consolas"/>
+              </a:rPr>
+              <a:t>FKB Campus  ·  VA09</a:t>
+            </a:r>
+          </a:p>
+        </p:txBody>
+      </p:sp>
+    </p:spTree>
+  </p:cSld>
+  <p:clrMapOvr>
+    <a:masterClrMapping/>
+  </p:clrMapOvr>
+</p:sld>
+</file>
+
+<file path=ppt/slides/slide13.xml><?xml version="1.0" encoding="utf-8"?>
+<p:sld xmlns:a="http://schemas.openxmlformats.org/drawingml/2006/main" xmlns:p="http://schemas.openxmlformats.org/presentationml/2006/main" xmlns:r="http://schemas.openxmlformats.org/officeDocument/2006/relationships">
+  <p:cSld>
+    <p:spTree>
+      <p:nvGrpSpPr>
+        <p:cNvPr id="1" name=""/>
+        <p:cNvGrpSpPr/>
+        <p:nvPr/>
+      </p:nvGrpSpPr>
+      <p:grpSpPr/>
+      <p:sp>
+        <p:nvSpPr>
+          <p:cNvPr id="2" name="Rectangle 1"/>
+          <p:cNvSpPr/>
+          <p:nvPr/>
+        </p:nvSpPr>
+        <p:spPr>
+          <a:xfrm>
+            <a:off x="0" y="0"/>
+            <a:ext cx="12188952" cy="6858000"/>
+          </a:xfrm>
+          <a:prstGeom prst="rect">
+            <a:avLst/>
+          </a:prstGeom>
+          <a:solidFill>
+            <a:srgbClr val="EDEDF3"/>
+          </a:solidFill>
+          <a:ln>
+            <a:noFill/>
+          </a:ln>
+        </p:spPr>
+        <p:style>
+          <a:lnRef idx="1">
+            <a:schemeClr val="accent1"/>
+          </a:lnRef>
+          <a:fillRef idx="3">
+            <a:schemeClr val="accent1"/>
+          </a:fillRef>
+          <a:effectRef idx="2">
+            <a:schemeClr val="accent1"/>
+          </a:effectRef>
+          <a:fontRef idx="minor">
+            <a:schemeClr val="lt1"/>
+          </a:fontRef>
+        </p:style>
+        <p:txBody>
+          <a:bodyPr rtlCol="0" anchor="ctr"/>
+          <a:lstStyle/>
+          <a:p>
+            <a:pPr algn="ctr"/>
+          </a:p>
+        </p:txBody>
+      </p:sp>
+      <p:sp>
+        <p:nvSpPr>
+          <p:cNvPr id="3" name="Rectangle 2"/>
+          <p:cNvSpPr/>
+          <p:nvPr/>
+        </p:nvSpPr>
+        <p:spPr>
+          <a:xfrm>
+            <a:off x="0" y="0"/>
+            <a:ext cx="12188952" cy="50292"/>
+          </a:xfrm>
+          <a:prstGeom prst="rect">
+            <a:avLst/>
+          </a:prstGeom>
+          <a:solidFill>
+            <a:srgbClr val="1F2C56"/>
+          </a:solidFill>
+          <a:ln>
+            <a:noFill/>
+          </a:ln>
+        </p:spPr>
+        <p:style>
+          <a:lnRef idx="1">
+            <a:schemeClr val="accent1"/>
+          </a:lnRef>
+          <a:fillRef idx="3">
+            <a:schemeClr val="accent1"/>
+          </a:fillRef>
+          <a:effectRef idx="2">
+            <a:schemeClr val="accent1"/>
+          </a:effectRef>
+          <a:fontRef idx="minor">
+            <a:schemeClr val="lt1"/>
+          </a:fontRef>
+        </p:style>
+        <p:txBody>
+          <a:bodyPr rtlCol="0" anchor="ctr"/>
+          <a:lstStyle/>
+          <a:p>
+            <a:pPr algn="ctr"/>
+          </a:p>
+        </p:txBody>
+      </p:sp>
+      <p:sp>
+        <p:nvSpPr>
+          <p:cNvPr id="4" name="TextBox 3"/>
+          <p:cNvSpPr txBox="1"/>
+          <p:nvPr/>
+        </p:nvSpPr>
+        <p:spPr>
+          <a:xfrm>
+            <a:off x="685800" y="109728"/>
+            <a:ext cx="10817352" cy="228600"/>
+          </a:xfrm>
+          <a:prstGeom prst="rect">
+            <a:avLst/>
+          </a:prstGeom>
+          <a:noFill/>
+        </p:spPr>
+        <p:txBody>
+          <a:bodyPr wrap="none">
+            <a:spAutoFit/>
+          </a:bodyPr>
+          <a:lstStyle/>
+          <a:p>
+            <a:pPr algn="l"/>
+            <a:r>
+              <a:rPr sz="750">
+                <a:solidFill>
+                  <a:srgbClr val="78808C"/>
+                </a:solidFill>
+                <a:latin typeface="Consolas"/>
+              </a:rPr>
+              <a:t>VA09  ·  INHALT</a:t>
+            </a:r>
+          </a:p>
+        </p:txBody>
+      </p:sp>
+      <p:sp>
+        <p:nvSpPr>
+          <p:cNvPr id="5" name="Rectangle 4"/>
+          <p:cNvSpPr/>
+          <p:nvPr/>
+        </p:nvSpPr>
+        <p:spPr>
+          <a:xfrm>
+            <a:off x="0" y="1234440"/>
+            <a:ext cx="12188952" cy="12700"/>
+          </a:xfrm>
+          <a:prstGeom prst="rect">
+            <a:avLst/>
+          </a:prstGeom>
+          <a:solidFill>
+            <a:srgbClr val="D8DFE4"/>
+          </a:solidFill>
+          <a:ln>
+            <a:noFill/>
+          </a:ln>
+        </p:spPr>
+        <p:style>
+          <a:lnRef idx="1">
+            <a:schemeClr val="accent1"/>
+          </a:lnRef>
+          <a:fillRef idx="3">
+            <a:schemeClr val="accent1"/>
+          </a:fillRef>
+          <a:effectRef idx="2">
+            <a:schemeClr val="accent1"/>
+          </a:effectRef>
+          <a:fontRef idx="minor">
+            <a:schemeClr val="lt1"/>
+          </a:fontRef>
+        </p:style>
+        <p:txBody>
+          <a:bodyPr rtlCol="0" anchor="ctr"/>
+          <a:lstStyle/>
+          <a:p>
+            <a:pPr algn="ctr"/>
+          </a:p>
+        </p:txBody>
+      </p:sp>
+      <p:sp>
+        <p:nvSpPr>
+          <p:cNvPr id="6" name="Rectangle 5"/>
+          <p:cNvSpPr/>
+          <p:nvPr/>
+        </p:nvSpPr>
+        <p:spPr>
+          <a:xfrm>
+            <a:off x="685800" y="502920"/>
+            <a:ext cx="36576" cy="658368"/>
+          </a:xfrm>
+          <a:prstGeom prst="rect">
+            <a:avLst/>
+          </a:prstGeom>
+          <a:solidFill>
+            <a:srgbClr val="D9C089"/>
+          </a:solidFill>
+          <a:ln>
+            <a:noFill/>
+          </a:ln>
+        </p:spPr>
+        <p:style>
+          <a:lnRef idx="1">
+            <a:schemeClr val="accent1"/>
+          </a:lnRef>
+          <a:fillRef idx="3">
+            <a:schemeClr val="accent1"/>
+          </a:fillRef>
+          <a:effectRef idx="2">
+            <a:schemeClr val="accent1"/>
+          </a:effectRef>
+          <a:fontRef idx="minor">
+            <a:schemeClr val="lt1"/>
+          </a:fontRef>
+        </p:style>
+        <p:txBody>
+          <a:bodyPr rtlCol="0" anchor="ctr"/>
+          <a:lstStyle/>
+          <a:p>
+            <a:pPr algn="ctr"/>
+          </a:p>
+        </p:txBody>
+      </p:sp>
+      <p:sp>
+        <p:nvSpPr>
+          <p:cNvPr id="7" name="TextBox 6"/>
+          <p:cNvSpPr txBox="1"/>
+          <p:nvPr/>
+        </p:nvSpPr>
+        <p:spPr>
+          <a:xfrm>
+            <a:off x="813816" y="502920"/>
+            <a:ext cx="10634472" cy="685800"/>
+          </a:xfrm>
+          <a:prstGeom prst="rect">
+            <a:avLst/>
+          </a:prstGeom>
+          <a:noFill/>
+        </p:spPr>
+        <p:txBody>
+          <a:bodyPr wrap="square">
+            <a:spAutoFit/>
+          </a:bodyPr>
+          <a:lstStyle/>
+          <a:p>
+            <a:pPr algn="l"/>
+            <a:r>
+              <a:rPr sz="2400" b="1" i="0">
+                <a:solidFill>
+                  <a:srgbClr val="1F2C56"/>
+                </a:solidFill>
+                <a:latin typeface="Arial"/>
+              </a:rPr>
+              <a:t>Handlungsempfehlung: filtern und aufbereiten</a:t>
+            </a:r>
+          </a:p>
+        </p:txBody>
+      </p:sp>
+      <p:sp>
+        <p:nvSpPr>
+          <p:cNvPr id="8" name="TextBox 7"/>
+          <p:cNvSpPr txBox="1"/>
+          <p:nvPr/>
+        </p:nvSpPr>
+        <p:spPr>
+          <a:xfrm>
+            <a:off x="685800" y="1417320"/>
+            <a:ext cx="10817352" cy="4892040"/>
+          </a:xfrm>
+          <a:prstGeom prst="rect">
+            <a:avLst/>
+          </a:prstGeom>
+          <a:noFill/>
+        </p:spPr>
+        <p:txBody>
+          <a:bodyPr wrap="square" anchor="ctr">
+            <a:spAutoFit/>
+          </a:bodyPr>
+          <a:lstStyle/>
+          <a:p>
+            <a:pPr marL="177800" indent="-177800">
+              <a:spcBef>
+                <a:spcPts val="600"/>
+              </a:spcBef>
+              <a:spcAft>
+                <a:spcPts val="200"/>
+              </a:spcAft>
+            </a:pPr>
+            <a:r>
+              <a:rPr sz="1200" i="1">
+                <a:solidFill>
+                  <a:srgbClr val="3D5466"/>
+                </a:solidFill>
+                <a:latin typeface="Arial"/>
+              </a:rPr>
+              <a:t>→  Wenn eine Kreditlinie dauerhaft über 90 % ausgelastet ist — dann als Erweiterungs-/Strukturanlass aufbereiten und dem Berater vorlegen.</a:t>
+            </a:r>
+          </a:p>
+          <a:p>
+            <a:pPr marL="177800" indent="-177800">
+              <a:spcBef>
+                <a:spcPts val="600"/>
+              </a:spcBef>
+              <a:spcAft>
+                <a:spcPts val="200"/>
+              </a:spcAft>
+            </a:pPr>
+            <a:r>
+              <a:rPr sz="1200" i="1">
+                <a:solidFill>
+                  <a:srgbClr val="3D5466"/>
+                </a:solidFill>
+                <a:latin typeface="Arial"/>
+              </a:rPr>
+              <a:t>→  Wenn ein Ausschlag einmalig oder saisonal erklärbar ist — dann als Datenrauschen einordnen und nicht als Anlass weitergeben.</a:t>
+            </a:r>
+          </a:p>
+          <a:p>
+            <a:pPr marL="177800" indent="-177800">
+              <a:spcBef>
+                <a:spcPts val="600"/>
+              </a:spcBef>
+              <a:spcAft>
+                <a:spcPts val="200"/>
+              </a:spcAft>
+            </a:pPr>
+            <a:r>
+              <a:rPr sz="1200" i="1">
+                <a:solidFill>
+                  <a:srgbClr val="3D5466"/>
+                </a:solidFill>
+                <a:latin typeface="Arial"/>
+              </a:rPr>
+              <a:t>→  Wenn der Berater vier Wochen nicht auf Anlässe eingeht — dann ein Check-in-Gespräch führen: nützlich, oder Fokus/Format anpassen?</a:t>
+            </a:r>
+          </a:p>
+        </p:txBody>
+      </p:sp>
+      <p:sp>
+        <p:nvSpPr>
+          <p:cNvPr id="9" name="Rectangle 8"/>
+          <p:cNvSpPr/>
+          <p:nvPr/>
+        </p:nvSpPr>
+        <p:spPr>
+          <a:xfrm>
+            <a:off x="0" y="6510528"/>
+            <a:ext cx="12188952" cy="347472"/>
+          </a:xfrm>
+          <a:prstGeom prst="rect">
+            <a:avLst/>
+          </a:prstGeom>
+          <a:solidFill>
+            <a:srgbClr val="0A1937"/>
+          </a:solidFill>
+          <a:ln>
+            <a:noFill/>
+          </a:ln>
+        </p:spPr>
+        <p:style>
+          <a:lnRef idx="1">
+            <a:schemeClr val="accent1"/>
+          </a:lnRef>
+          <a:fillRef idx="3">
+            <a:schemeClr val="accent1"/>
+          </a:fillRef>
+          <a:effectRef idx="2">
+            <a:schemeClr val="accent1"/>
+          </a:effectRef>
+          <a:fontRef idx="minor">
+            <a:schemeClr val="lt1"/>
+          </a:fontRef>
+        </p:style>
+        <p:txBody>
+          <a:bodyPr rtlCol="0" anchor="ctr"/>
+          <a:lstStyle/>
+          <a:p>
+            <a:pPr algn="ctr"/>
+          </a:p>
+        </p:txBody>
+      </p:sp>
+      <p:sp>
+        <p:nvSpPr>
+          <p:cNvPr id="10" name="TextBox 9"/>
+          <p:cNvSpPr txBox="1"/>
+          <p:nvPr/>
+        </p:nvSpPr>
+        <p:spPr>
+          <a:xfrm>
+            <a:off x="685800" y="6583680"/>
+            <a:ext cx="6490411" cy="256032"/>
+          </a:xfrm>
+          <a:prstGeom prst="rect">
+            <a:avLst/>
+          </a:prstGeom>
+          <a:noFill/>
+        </p:spPr>
+        <p:txBody>
+          <a:bodyPr wrap="none">
+            <a:spAutoFit/>
+          </a:bodyPr>
+          <a:lstStyle/>
+          <a:p>
+            <a:pPr algn="l"/>
+            <a:r>
+              <a:rPr sz="700">
+                <a:solidFill>
+                  <a:srgbClr val="A0B4D2"/>
+                </a:solidFill>
+                <a:latin typeface="Consolas"/>
+              </a:rPr>
+              <a:t>FKB Campus  ·  VA09</a:t>
+            </a:r>
+          </a:p>
+        </p:txBody>
+      </p:sp>
+    </p:spTree>
+  </p:cSld>
+  <p:clrMapOvr>
+    <a:masterClrMapping/>
+  </p:clrMapOvr>
+</p:sld>
+</file>
+
+<file path=ppt/slides/slide14.xml><?xml version="1.0" encoding="utf-8"?>
+<p:sld xmlns:a="http://schemas.openxmlformats.org/drawingml/2006/main" xmlns:p="http://schemas.openxmlformats.org/presentationml/2006/main" xmlns:r="http://schemas.openxmlformats.org/officeDocument/2006/relationships">
+  <p:cSld>
+    <p:spTree>
+      <p:nvGrpSpPr>
+        <p:cNvPr id="1" name=""/>
+        <p:cNvGrpSpPr/>
+        <p:nvPr/>
+      </p:nvGrpSpPr>
+      <p:grpSpPr/>
+      <p:sp>
+        <p:nvSpPr>
+          <p:cNvPr id="2" name="Rectangle 1"/>
+          <p:cNvSpPr/>
+          <p:nvPr/>
+        </p:nvSpPr>
+        <p:spPr>
+          <a:xfrm>
+            <a:off x="0" y="0"/>
+            <a:ext cx="12188952" cy="6858000"/>
+          </a:xfrm>
+          <a:prstGeom prst="rect">
+            <a:avLst/>
+          </a:prstGeom>
+          <a:solidFill>
+            <a:srgbClr val="EDEDF3"/>
+          </a:solidFill>
+          <a:ln>
+            <a:noFill/>
+          </a:ln>
+        </p:spPr>
+        <p:style>
+          <a:lnRef idx="1">
+            <a:schemeClr val="accent1"/>
+          </a:lnRef>
+          <a:fillRef idx="3">
+            <a:schemeClr val="accent1"/>
+          </a:fillRef>
+          <a:effectRef idx="2">
+            <a:schemeClr val="accent1"/>
+          </a:effectRef>
+          <a:fontRef idx="minor">
+            <a:schemeClr val="lt1"/>
+          </a:fontRef>
+        </p:style>
+        <p:txBody>
+          <a:bodyPr rtlCol="0" anchor="ctr"/>
+          <a:lstStyle/>
+          <a:p>
+            <a:pPr algn="ctr"/>
+          </a:p>
+        </p:txBody>
+      </p:sp>
+      <p:sp>
+        <p:nvSpPr>
+          <p:cNvPr id="3" name="Rectangle 2"/>
+          <p:cNvSpPr/>
+          <p:nvPr/>
+        </p:nvSpPr>
+        <p:spPr>
+          <a:xfrm>
+            <a:off x="0" y="0"/>
+            <a:ext cx="12188952" cy="50292"/>
+          </a:xfrm>
+          <a:prstGeom prst="rect">
+            <a:avLst/>
+          </a:prstGeom>
+          <a:solidFill>
+            <a:srgbClr val="1F2C56"/>
+          </a:solidFill>
+          <a:ln>
+            <a:noFill/>
+          </a:ln>
+        </p:spPr>
+        <p:style>
+          <a:lnRef idx="1">
+            <a:schemeClr val="accent1"/>
+          </a:lnRef>
+          <a:fillRef idx="3">
+            <a:schemeClr val="accent1"/>
+          </a:fillRef>
+          <a:effectRef idx="2">
+            <a:schemeClr val="accent1"/>
+          </a:effectRef>
+          <a:fontRef idx="minor">
+            <a:schemeClr val="lt1"/>
+          </a:fontRef>
+        </p:style>
+        <p:txBody>
+          <a:bodyPr rtlCol="0" anchor="ctr"/>
+          <a:lstStyle/>
+          <a:p>
+            <a:pPr algn="ctr"/>
+          </a:p>
+        </p:txBody>
+      </p:sp>
+      <p:sp>
+        <p:nvSpPr>
+          <p:cNvPr id="4" name="TextBox 3"/>
+          <p:cNvSpPr txBox="1"/>
+          <p:nvPr/>
+        </p:nvSpPr>
+        <p:spPr>
+          <a:xfrm>
+            <a:off x="685800" y="109728"/>
+            <a:ext cx="10817352" cy="228600"/>
+          </a:xfrm>
+          <a:prstGeom prst="rect">
+            <a:avLst/>
+          </a:prstGeom>
+          <a:noFill/>
+        </p:spPr>
+        <p:txBody>
+          <a:bodyPr wrap="none">
+            <a:spAutoFit/>
+          </a:bodyPr>
+          <a:lstStyle/>
+          <a:p>
+            <a:pPr algn="l"/>
+            <a:r>
+              <a:rPr sz="750">
+                <a:solidFill>
+                  <a:srgbClr val="78808C"/>
+                </a:solidFill>
+                <a:latin typeface="Consolas"/>
+              </a:rPr>
+              <a:t>VA09  ·  ARBEITSBLATT</a:t>
+            </a:r>
+          </a:p>
+        </p:txBody>
+      </p:sp>
+      <p:sp>
+        <p:nvSpPr>
+          <p:cNvPr id="5" name="Rectangle 4"/>
+          <p:cNvSpPr/>
+          <p:nvPr/>
+        </p:nvSpPr>
+        <p:spPr>
+          <a:xfrm>
+            <a:off x="0" y="1234440"/>
+            <a:ext cx="12188952" cy="12700"/>
+          </a:xfrm>
+          <a:prstGeom prst="rect">
+            <a:avLst/>
+          </a:prstGeom>
+          <a:solidFill>
+            <a:srgbClr val="D8DFE4"/>
+          </a:solidFill>
+          <a:ln>
+            <a:noFill/>
+          </a:ln>
+        </p:spPr>
+        <p:style>
+          <a:lnRef idx="1">
+            <a:schemeClr val="accent1"/>
+          </a:lnRef>
+          <a:fillRef idx="3">
+            <a:schemeClr val="accent1"/>
+          </a:fillRef>
+          <a:effectRef idx="2">
+            <a:schemeClr val="accent1"/>
+          </a:effectRef>
+          <a:fontRef idx="minor">
+            <a:schemeClr val="lt1"/>
+          </a:fontRef>
+        </p:style>
+        <p:txBody>
+          <a:bodyPr rtlCol="0" anchor="ctr"/>
+          <a:lstStyle/>
+          <a:p>
+            <a:pPr algn="ctr"/>
+          </a:p>
+        </p:txBody>
+      </p:sp>
+      <p:sp>
+        <p:nvSpPr>
+          <p:cNvPr id="6" name="Rectangle 5"/>
+          <p:cNvSpPr/>
+          <p:nvPr/>
+        </p:nvSpPr>
+        <p:spPr>
+          <a:xfrm>
+            <a:off x="685800" y="502920"/>
+            <a:ext cx="36576" cy="658368"/>
+          </a:xfrm>
+          <a:prstGeom prst="rect">
+            <a:avLst/>
+          </a:prstGeom>
+          <a:solidFill>
+            <a:srgbClr val="D9C089"/>
+          </a:solidFill>
+          <a:ln>
+            <a:noFill/>
+          </a:ln>
+        </p:spPr>
+        <p:style>
+          <a:lnRef idx="1">
+            <a:schemeClr val="accent1"/>
+          </a:lnRef>
+          <a:fillRef idx="3">
+            <a:schemeClr val="accent1"/>
+          </a:fillRef>
+          <a:effectRef idx="2">
+            <a:schemeClr val="accent1"/>
+          </a:effectRef>
+          <a:fontRef idx="minor">
+            <a:schemeClr val="lt1"/>
+          </a:fontRef>
+        </p:style>
+        <p:txBody>
+          <a:bodyPr rtlCol="0" anchor="ctr"/>
+          <a:lstStyle/>
+          <a:p>
+            <a:pPr algn="ctr"/>
+          </a:p>
+        </p:txBody>
+      </p:sp>
+      <p:sp>
+        <p:nvSpPr>
+          <p:cNvPr id="7" name="TextBox 6"/>
+          <p:cNvSpPr txBox="1"/>
+          <p:nvPr/>
+        </p:nvSpPr>
+        <p:spPr>
+          <a:xfrm>
+            <a:off x="813816" y="502920"/>
+            <a:ext cx="10634472" cy="685800"/>
+          </a:xfrm>
+          <a:prstGeom prst="rect">
+            <a:avLst/>
+          </a:prstGeom>
+          <a:noFill/>
+        </p:spPr>
+        <p:txBody>
+          <a:bodyPr wrap="square">
+            <a:spAutoFit/>
+          </a:bodyPr>
+          <a:lstStyle/>
+          <a:p>
+            <a:pPr algn="l"/>
+            <a:r>
+              <a:rPr sz="2400" b="1" i="0">
+                <a:solidFill>
+                  <a:srgbClr val="1F2C56"/>
+                </a:solidFill>
+                <a:latin typeface="Arial"/>
+              </a:rPr>
+              <a:t>Praxisfall bearbeiten: vom Signal zum Anlass</a:t>
+            </a:r>
+          </a:p>
+        </p:txBody>
+      </p:sp>
+      <p:sp>
+        <p:nvSpPr>
+          <p:cNvPr id="8" name="TextBox 7"/>
+          <p:cNvSpPr txBox="1"/>
+          <p:nvPr/>
+        </p:nvSpPr>
+        <p:spPr>
+          <a:xfrm>
+            <a:off x="685800" y="1554480"/>
+            <a:ext cx="10817352" cy="3840480"/>
+          </a:xfrm>
+          <a:prstGeom prst="rect">
+            <a:avLst/>
+          </a:prstGeom>
+          <a:noFill/>
+        </p:spPr>
+        <p:txBody>
+          <a:bodyPr wrap="square">
+            <a:spAutoFit/>
+          </a:bodyPr>
+          <a:lstStyle/>
+          <a:p>
+            <a:pPr marL="190500" indent="-190500">
+              <a:spcBef>
+                <a:spcPts val="400"/>
+              </a:spcBef>
+              <a:spcAft>
+                <a:spcPts val="200"/>
+              </a:spcAft>
+            </a:pPr>
+            <a:r>
+              <a:rPr sz="1400">
+                <a:solidFill>
+                  <a:srgbClr val="3D5466"/>
+                </a:solidFill>
+                <a:latin typeface="Arial"/>
+              </a:rPr>
+              <a:t>▸  Screenen Sie die vier Kundenprofile auf Anlasstypen (AB-1).</a:t>
+            </a:r>
+          </a:p>
+          <a:p>
+            <a:pPr marL="190500" indent="-190500">
+              <a:spcBef>
+                <a:spcPts val="400"/>
+              </a:spcBef>
+              <a:spcAft>
+                <a:spcPts val="200"/>
+              </a:spcAft>
+            </a:pPr>
+            <a:r>
+              <a:rPr sz="1400">
+                <a:solidFill>
+                  <a:srgbClr val="3D5466"/>
+                </a:solidFill>
+                <a:latin typeface="Arial"/>
+              </a:rPr>
+              <a:t>▸  Bewerten Sie die Relevanz mit den drei Prüffragen (AB-2).</a:t>
+            </a:r>
+          </a:p>
+          <a:p>
+            <a:pPr marL="190500" indent="-190500">
+              <a:spcBef>
+                <a:spcPts val="400"/>
+              </a:spcBef>
+              <a:spcAft>
+                <a:spcPts val="200"/>
+              </a:spcAft>
+            </a:pPr>
+            <a:r>
+              <a:rPr sz="1400">
+                <a:solidFill>
+                  <a:srgbClr val="3D5466"/>
+                </a:solidFill>
+                <a:latin typeface="Arial"/>
+              </a:rPr>
+              <a:t>▸  Begründen Sie Ihre Signal-/Rauschen-Entscheidung je Fall (AB-3).</a:t>
+            </a:r>
+          </a:p>
+          <a:p>
+            <a:pPr marL="190500" indent="-190500">
+              <a:spcBef>
+                <a:spcPts val="400"/>
+              </a:spcBef>
+              <a:spcAft>
+                <a:spcPts val="200"/>
+              </a:spcAft>
+            </a:pPr>
+            <a:r>
+              <a:rPr sz="1400">
+                <a:solidFill>
+                  <a:srgbClr val="3D5466"/>
+                </a:solidFill>
+                <a:latin typeface="Arial"/>
+              </a:rPr>
+              <a:t>▸  Erstellen Sie für den stärksten Anlass eine entscheidungsreife Aufbereitung (AB-4) – Karte AB-5 als Werkzeug.</a:t>
+            </a:r>
+          </a:p>
+        </p:txBody>
+      </p:sp>
+      <p:sp>
+        <p:nvSpPr>
+          <p:cNvPr id="9" name="Rectangle 8"/>
+          <p:cNvSpPr/>
+          <p:nvPr/>
+        </p:nvSpPr>
+        <p:spPr>
+          <a:xfrm>
+            <a:off x="685800" y="5486400"/>
+            <a:ext cx="10817352" cy="640080"/>
+          </a:xfrm>
+          <a:prstGeom prst="rect">
+            <a:avLst/>
+          </a:prstGeom>
+          <a:solidFill>
+            <a:srgbClr val="1F2C56"/>
+          </a:solidFill>
+          <a:ln>
+            <a:noFill/>
+          </a:ln>
+        </p:spPr>
+        <p:style>
+          <a:lnRef idx="1">
+            <a:schemeClr val="accent1"/>
+          </a:lnRef>
+          <a:fillRef idx="3">
+            <a:schemeClr val="accent1"/>
+          </a:fillRef>
+          <a:effectRef idx="2">
+            <a:schemeClr val="accent1"/>
+          </a:effectRef>
+          <a:fontRef idx="minor">
+            <a:schemeClr val="lt1"/>
+          </a:fontRef>
+        </p:style>
+        <p:txBody>
+          <a:bodyPr rtlCol="0" anchor="ctr"/>
+          <a:lstStyle/>
+          <a:p>
+            <a:pPr algn="ctr"/>
+          </a:p>
+        </p:txBody>
+      </p:sp>
+      <p:sp>
+        <p:nvSpPr>
+          <p:cNvPr id="10" name="TextBox 9"/>
+          <p:cNvSpPr txBox="1"/>
+          <p:nvPr/>
+        </p:nvSpPr>
+        <p:spPr>
+          <a:xfrm>
+            <a:off x="868680" y="5596128"/>
+            <a:ext cx="10451592" cy="457200"/>
+          </a:xfrm>
+          <a:prstGeom prst="rect">
+            <a:avLst/>
+          </a:prstGeom>
+          <a:noFill/>
+        </p:spPr>
+        <p:txBody>
+          <a:bodyPr wrap="square">
+            <a:spAutoFit/>
+          </a:bodyPr>
+          <a:lstStyle/>
+          <a:p>
+            <a:pPr algn="l"/>
+            <a:r>
+              <a:rPr sz="1300" b="1" i="0">
+                <a:solidFill>
+                  <a:srgbClr val="FFFFFF"/>
+                </a:solidFill>
+                <a:latin typeface="Arial"/>
+              </a:rPr>
+              <a:t>→  Bearbeitung im Teilnehmer-Workbook (Arbeitsblatt mit Ausfüllfeldern)</a:t>
+            </a:r>
+          </a:p>
+        </p:txBody>
+      </p:sp>
+      <p:sp>
+        <p:nvSpPr>
+          <p:cNvPr id="11" name="Rectangle 10"/>
+          <p:cNvSpPr/>
+          <p:nvPr/>
+        </p:nvSpPr>
+        <p:spPr>
+          <a:xfrm>
+            <a:off x="0" y="6510528"/>
+            <a:ext cx="12188952" cy="347472"/>
+          </a:xfrm>
+          <a:prstGeom prst="rect">
+            <a:avLst/>
+          </a:prstGeom>
+          <a:solidFill>
+            <a:srgbClr val="0A1937"/>
+          </a:solidFill>
+          <a:ln>
+            <a:noFill/>
+          </a:ln>
+        </p:spPr>
+        <p:style>
+          <a:lnRef idx="1">
+            <a:schemeClr val="accent1"/>
+          </a:lnRef>
+          <a:fillRef idx="3">
+            <a:schemeClr val="accent1"/>
+          </a:fillRef>
+          <a:effectRef idx="2">
+            <a:schemeClr val="accent1"/>
+          </a:effectRef>
+          <a:fontRef idx="minor">
+            <a:schemeClr val="lt1"/>
+          </a:fontRef>
+        </p:style>
+        <p:txBody>
+          <a:bodyPr rtlCol="0" anchor="ctr"/>
+          <a:lstStyle/>
+          <a:p>
+            <a:pPr algn="ctr"/>
+          </a:p>
+        </p:txBody>
+      </p:sp>
+      <p:sp>
+        <p:nvSpPr>
+          <p:cNvPr id="12" name="TextBox 11"/>
+          <p:cNvSpPr txBox="1"/>
+          <p:nvPr/>
+        </p:nvSpPr>
+        <p:spPr>
+          <a:xfrm>
+            <a:off x="685800" y="6583680"/>
+            <a:ext cx="6490411" cy="256032"/>
+          </a:xfrm>
+          <a:prstGeom prst="rect">
+            <a:avLst/>
+          </a:prstGeom>
+          <a:noFill/>
+        </p:spPr>
+        <p:txBody>
+          <a:bodyPr wrap="none">
+            <a:spAutoFit/>
+          </a:bodyPr>
+          <a:lstStyle/>
+          <a:p>
+            <a:pPr algn="l"/>
+            <a:r>
+              <a:rPr sz="700">
+                <a:solidFill>
+                  <a:srgbClr val="A0B4D2"/>
+                </a:solidFill>
+                <a:latin typeface="Consolas"/>
+              </a:rPr>
+              <a:t>FKB Campus  ·  VA09</a:t>
+            </a:r>
+          </a:p>
+        </p:txBody>
+      </p:sp>
+    </p:spTree>
+  </p:cSld>
+  <p:clrMapOvr>
+    <a:masterClrMapping/>
+  </p:clrMapOvr>
+</p:sld>
+</file>
+
+<file path=ppt/slides/slide15.xml><?xml version="1.0" encoding="utf-8"?>
+<p:sld xmlns:a="http://schemas.openxmlformats.org/drawingml/2006/main" xmlns:p="http://schemas.openxmlformats.org/presentationml/2006/main" xmlns:r="http://schemas.openxmlformats.org/officeDocument/2006/relationships">
+  <p:cSld>
+    <p:spTree>
+      <p:nvGrpSpPr>
+        <p:cNvPr id="1" name=""/>
+        <p:cNvGrpSpPr/>
+        <p:nvPr/>
+      </p:nvGrpSpPr>
+      <p:grpSpPr/>
+      <p:sp>
+        <p:nvSpPr>
+          <p:cNvPr id="2" name="Rectangle 1"/>
+          <p:cNvSpPr/>
+          <p:nvPr/>
+        </p:nvSpPr>
+        <p:spPr>
+          <a:xfrm>
+            <a:off x="0" y="0"/>
+            <a:ext cx="12188952" cy="6858000"/>
+          </a:xfrm>
+          <a:prstGeom prst="rect">
+            <a:avLst/>
+          </a:prstGeom>
+          <a:solidFill>
+            <a:srgbClr val="EDEDF3"/>
+          </a:solidFill>
+          <a:ln>
+            <a:noFill/>
+          </a:ln>
+        </p:spPr>
+        <p:style>
+          <a:lnRef idx="1">
+            <a:schemeClr val="accent1"/>
+          </a:lnRef>
+          <a:fillRef idx="3">
+            <a:schemeClr val="accent1"/>
+          </a:fillRef>
+          <a:effectRef idx="2">
+            <a:schemeClr val="accent1"/>
+          </a:effectRef>
+          <a:fontRef idx="minor">
+            <a:schemeClr val="lt1"/>
+          </a:fontRef>
+        </p:style>
+        <p:txBody>
+          <a:bodyPr rtlCol="0" anchor="ctr"/>
+          <a:lstStyle/>
+          <a:p>
+            <a:pPr algn="ctr"/>
+          </a:p>
+        </p:txBody>
+      </p:sp>
+      <p:sp>
+        <p:nvSpPr>
+          <p:cNvPr id="3" name="Rectangle 2"/>
+          <p:cNvSpPr/>
+          <p:nvPr/>
+        </p:nvSpPr>
+        <p:spPr>
+          <a:xfrm>
+            <a:off x="0" y="0"/>
+            <a:ext cx="12188952" cy="50292"/>
+          </a:xfrm>
+          <a:prstGeom prst="rect">
+            <a:avLst/>
+          </a:prstGeom>
+          <a:solidFill>
+            <a:srgbClr val="1F2C56"/>
+          </a:solidFill>
+          <a:ln>
+            <a:noFill/>
+          </a:ln>
+        </p:spPr>
+        <p:style>
+          <a:lnRef idx="1">
+            <a:schemeClr val="accent1"/>
+          </a:lnRef>
+          <a:fillRef idx="3">
+            <a:schemeClr val="accent1"/>
+          </a:fillRef>
+          <a:effectRef idx="2">
+            <a:schemeClr val="accent1"/>
+          </a:effectRef>
+          <a:fontRef idx="minor">
+            <a:schemeClr val="lt1"/>
+          </a:fontRef>
+        </p:style>
+        <p:txBody>
+          <a:bodyPr rtlCol="0" anchor="ctr"/>
+          <a:lstStyle/>
+          <a:p>
+            <a:pPr algn="ctr"/>
+          </a:p>
+        </p:txBody>
+      </p:sp>
+      <p:sp>
+        <p:nvSpPr>
+          <p:cNvPr id="4" name="TextBox 3"/>
+          <p:cNvSpPr txBox="1"/>
+          <p:nvPr/>
+        </p:nvSpPr>
+        <p:spPr>
+          <a:xfrm>
+            <a:off x="685800" y="109728"/>
+            <a:ext cx="10817352" cy="228600"/>
+          </a:xfrm>
+          <a:prstGeom prst="rect">
+            <a:avLst/>
+          </a:prstGeom>
+          <a:noFill/>
+        </p:spPr>
+        <p:txBody>
+          <a:bodyPr wrap="none">
+            <a:spAutoFit/>
+          </a:bodyPr>
+          <a:lstStyle/>
+          <a:p>
+            <a:pPr algn="l"/>
+            <a:r>
+              <a:rPr sz="750">
+                <a:solidFill>
+                  <a:srgbClr val="78808C"/>
+                </a:solidFill>
+                <a:latin typeface="Consolas"/>
+              </a:rPr>
+              <a:t>VA09  ·  INHALT</a:t>
+            </a:r>
+          </a:p>
+        </p:txBody>
+      </p:sp>
+      <p:sp>
+        <p:nvSpPr>
+          <p:cNvPr id="5" name="Rectangle 4"/>
+          <p:cNvSpPr/>
+          <p:nvPr/>
+        </p:nvSpPr>
+        <p:spPr>
+          <a:xfrm>
+            <a:off x="0" y="1234440"/>
+            <a:ext cx="12188952" cy="12700"/>
+          </a:xfrm>
+          <a:prstGeom prst="rect">
+            <a:avLst/>
+          </a:prstGeom>
+          <a:solidFill>
+            <a:srgbClr val="D8DFE4"/>
+          </a:solidFill>
+          <a:ln>
+            <a:noFill/>
+          </a:ln>
+        </p:spPr>
+        <p:style>
+          <a:lnRef idx="1">
+            <a:schemeClr val="accent1"/>
+          </a:lnRef>
+          <a:fillRef idx="3">
+            <a:schemeClr val="accent1"/>
+          </a:fillRef>
+          <a:effectRef idx="2">
+            <a:schemeClr val="accent1"/>
+          </a:effectRef>
+          <a:fontRef idx="minor">
+            <a:schemeClr val="lt1"/>
+          </a:fontRef>
+        </p:style>
+        <p:txBody>
+          <a:bodyPr rtlCol="0" anchor="ctr"/>
+          <a:lstStyle/>
+          <a:p>
+            <a:pPr algn="ctr"/>
+          </a:p>
+        </p:txBody>
+      </p:sp>
+      <p:sp>
+        <p:nvSpPr>
+          <p:cNvPr id="6" name="Rectangle 5"/>
+          <p:cNvSpPr/>
+          <p:nvPr/>
+        </p:nvSpPr>
+        <p:spPr>
+          <a:xfrm>
+            <a:off x="685800" y="502920"/>
+            <a:ext cx="36576" cy="658368"/>
+          </a:xfrm>
+          <a:prstGeom prst="rect">
+            <a:avLst/>
+          </a:prstGeom>
+          <a:solidFill>
+            <a:srgbClr val="D9C089"/>
+          </a:solidFill>
+          <a:ln>
+            <a:noFill/>
+          </a:ln>
+        </p:spPr>
+        <p:style>
+          <a:lnRef idx="1">
+            <a:schemeClr val="accent1"/>
+          </a:lnRef>
+          <a:fillRef idx="3">
+            <a:schemeClr val="accent1"/>
+          </a:fillRef>
+          <a:effectRef idx="2">
+            <a:schemeClr val="accent1"/>
+          </a:effectRef>
+          <a:fontRef idx="minor">
+            <a:schemeClr val="lt1"/>
+          </a:fontRef>
+        </p:style>
+        <p:txBody>
+          <a:bodyPr rtlCol="0" anchor="ctr"/>
+          <a:lstStyle/>
+          <a:p>
+            <a:pPr algn="ctr"/>
+          </a:p>
+        </p:txBody>
+      </p:sp>
+      <p:sp>
+        <p:nvSpPr>
+          <p:cNvPr id="7" name="TextBox 6"/>
+          <p:cNvSpPr txBox="1"/>
+          <p:nvPr/>
+        </p:nvSpPr>
+        <p:spPr>
+          <a:xfrm>
+            <a:off x="813816" y="502920"/>
+            <a:ext cx="10634472" cy="685800"/>
+          </a:xfrm>
+          <a:prstGeom prst="rect">
+            <a:avLst/>
+          </a:prstGeom>
+          <a:noFill/>
+        </p:spPr>
+        <p:txBody>
+          <a:bodyPr wrap="square">
+            <a:spAutoFit/>
+          </a:bodyPr>
+          <a:lstStyle/>
+          <a:p>
+            <a:pPr algn="l"/>
+            <a:r>
+              <a:rPr sz="2400" b="1" i="0">
+                <a:solidFill>
+                  <a:srgbClr val="1F2C56"/>
+                </a:solidFill>
+                <a:latin typeface="Arial"/>
+              </a:rPr>
+              <a:t>Prinzip dieses Moduls</a:t>
+            </a:r>
+          </a:p>
+        </p:txBody>
+      </p:sp>
+      <p:sp>
+        <p:nvSpPr>
+          <p:cNvPr id="8" name="TextBox 7"/>
+          <p:cNvSpPr txBox="1"/>
+          <p:nvPr/>
+        </p:nvSpPr>
+        <p:spPr>
+          <a:xfrm>
+            <a:off x="685800" y="1417320"/>
+            <a:ext cx="10817352" cy="4892040"/>
+          </a:xfrm>
+          <a:prstGeom prst="rect">
+            <a:avLst/>
+          </a:prstGeom>
+          <a:noFill/>
+        </p:spPr>
+        <p:txBody>
+          <a:bodyPr wrap="square" anchor="ctr">
+            <a:spAutoFit/>
+          </a:bodyPr>
+          <a:lstStyle/>
+          <a:p>
+            <a:pPr marL="177800" indent="-177800">
+              <a:spcBef>
+                <a:spcPts val="600"/>
+              </a:spcBef>
+              <a:spcAft>
+                <a:spcPts val="200"/>
+              </a:spcAft>
+            </a:pPr>
+            <a:r>
+              <a:rPr sz="1200" i="1">
+                <a:solidFill>
+                  <a:srgbClr val="3D5466"/>
+                </a:solidFill>
+                <a:latin typeface="Arial"/>
+              </a:rPr>
+              <a:t>→  Ein guter Anlass wird aufbereitet, kein Datenrauschen weitergereicht.</a:t>
+            </a:r>
+          </a:p>
+          <a:p>
+            <a:pPr marL="190500" indent="-190500">
+              <a:spcBef>
+                <a:spcPts val="400"/>
+              </a:spcBef>
+              <a:spcAft>
+                <a:spcPts val="200"/>
+              </a:spcAft>
+            </a:pPr>
+            <a:r>
+              <a:rPr sz="1300">
+                <a:solidFill>
+                  <a:srgbClr val="3D5466"/>
+                </a:solidFill>
+                <a:latin typeface="Arial"/>
+              </a:rPr>
+              <a:t>▸  Der Innendienst filtert die echte Beratungschance heraus und legt sie dem Berater entscheidungsreif vor.</a:t>
+            </a:r>
+          </a:p>
+        </p:txBody>
+      </p:sp>
+      <p:sp>
+        <p:nvSpPr>
+          <p:cNvPr id="9" name="Rectangle 8"/>
+          <p:cNvSpPr/>
+          <p:nvPr/>
+        </p:nvSpPr>
+        <p:spPr>
+          <a:xfrm>
+            <a:off x="0" y="6510528"/>
+            <a:ext cx="12188952" cy="347472"/>
+          </a:xfrm>
+          <a:prstGeom prst="rect">
+            <a:avLst/>
+          </a:prstGeom>
+          <a:solidFill>
+            <a:srgbClr val="0A1937"/>
+          </a:solidFill>
+          <a:ln>
+            <a:noFill/>
+          </a:ln>
+        </p:spPr>
+        <p:style>
+          <a:lnRef idx="1">
+            <a:schemeClr val="accent1"/>
+          </a:lnRef>
+          <a:fillRef idx="3">
+            <a:schemeClr val="accent1"/>
+          </a:fillRef>
+          <a:effectRef idx="2">
+            <a:schemeClr val="accent1"/>
+          </a:effectRef>
+          <a:fontRef idx="minor">
+            <a:schemeClr val="lt1"/>
+          </a:fontRef>
+        </p:style>
+        <p:txBody>
+          <a:bodyPr rtlCol="0" anchor="ctr"/>
+          <a:lstStyle/>
+          <a:p>
+            <a:pPr algn="ctr"/>
+          </a:p>
+        </p:txBody>
+      </p:sp>
+      <p:sp>
+        <p:nvSpPr>
+          <p:cNvPr id="10" name="TextBox 9"/>
+          <p:cNvSpPr txBox="1"/>
+          <p:nvPr/>
+        </p:nvSpPr>
+        <p:spPr>
+          <a:xfrm>
+            <a:off x="685800" y="6583680"/>
+            <a:ext cx="6490411" cy="256032"/>
+          </a:xfrm>
+          <a:prstGeom prst="rect">
+            <a:avLst/>
+          </a:prstGeom>
+          <a:noFill/>
+        </p:spPr>
+        <p:txBody>
+          <a:bodyPr wrap="none">
+            <a:spAutoFit/>
+          </a:bodyPr>
+          <a:lstStyle/>
+          <a:p>
+            <a:pPr algn="l"/>
+            <a:r>
+              <a:rPr sz="700">
+                <a:solidFill>
+                  <a:srgbClr val="A0B4D2"/>
+                </a:solidFill>
+                <a:latin typeface="Consolas"/>
+              </a:rPr>
+              <a:t>FKB Campus  ·  VA09</a:t>
+            </a:r>
+          </a:p>
+        </p:txBody>
+      </p:sp>
+    </p:spTree>
+  </p:cSld>
+  <p:clrMapOvr>
+    <a:masterClrMapping/>
+  </p:clrMapOvr>
+</p:sld>
+</file>
+
+<file path=ppt/slides/slide16.xml><?xml version="1.0" encoding="utf-8"?>
+<p:sld xmlns:a="http://schemas.openxmlformats.org/drawingml/2006/main" xmlns:p="http://schemas.openxmlformats.org/presentationml/2006/main" xmlns:r="http://schemas.openxmlformats.org/officeDocument/2006/relationships">
+  <p:cSld>
+    <p:spTree>
+      <p:nvGrpSpPr>
+        <p:cNvPr id="1" name=""/>
+        <p:cNvGrpSpPr/>
+        <p:nvPr/>
+      </p:nvGrpSpPr>
+      <p:grpSpPr/>
+      <p:sp>
+        <p:nvSpPr>
+          <p:cNvPr id="2" name="Rectangle 1"/>
+          <p:cNvSpPr/>
+          <p:nvPr/>
+        </p:nvSpPr>
+        <p:spPr>
+          <a:xfrm>
+            <a:off x="0" y="0"/>
+            <a:ext cx="12188952" cy="6858000"/>
+          </a:xfrm>
+          <a:prstGeom prst="rect">
+            <a:avLst/>
+          </a:prstGeom>
+          <a:solidFill>
+            <a:srgbClr val="EDEDF3"/>
+          </a:solidFill>
+          <a:ln>
+            <a:noFill/>
+          </a:ln>
+        </p:spPr>
+        <p:style>
+          <a:lnRef idx="1">
+            <a:schemeClr val="accent1"/>
+          </a:lnRef>
+          <a:fillRef idx="3">
+            <a:schemeClr val="accent1"/>
+          </a:fillRef>
+          <a:effectRef idx="2">
+            <a:schemeClr val="accent1"/>
+          </a:effectRef>
+          <a:fontRef idx="minor">
+            <a:schemeClr val="lt1"/>
+          </a:fontRef>
+        </p:style>
+        <p:txBody>
+          <a:bodyPr rtlCol="0" anchor="ctr"/>
+          <a:lstStyle/>
+          <a:p>
+            <a:pPr algn="ctr"/>
+          </a:p>
+        </p:txBody>
+      </p:sp>
+      <p:sp>
+        <p:nvSpPr>
+          <p:cNvPr id="3" name="Rectangle 2"/>
+          <p:cNvSpPr/>
+          <p:nvPr/>
+        </p:nvSpPr>
+        <p:spPr>
+          <a:xfrm>
+            <a:off x="0" y="0"/>
+            <a:ext cx="12188952" cy="50292"/>
+          </a:xfrm>
+          <a:prstGeom prst="rect">
+            <a:avLst/>
+          </a:prstGeom>
+          <a:solidFill>
+            <a:srgbClr val="1F2C56"/>
+          </a:solidFill>
+          <a:ln>
+            <a:noFill/>
+          </a:ln>
+        </p:spPr>
+        <p:style>
+          <a:lnRef idx="1">
+            <a:schemeClr val="accent1"/>
+          </a:lnRef>
+          <a:fillRef idx="3">
+            <a:schemeClr val="accent1"/>
+          </a:fillRef>
+          <a:effectRef idx="2">
+            <a:schemeClr val="accent1"/>
+          </a:effectRef>
+          <a:fontRef idx="minor">
+            <a:schemeClr val="lt1"/>
+          </a:fontRef>
+        </p:style>
+        <p:txBody>
+          <a:bodyPr rtlCol="0" anchor="ctr"/>
+          <a:lstStyle/>
+          <a:p>
+            <a:pPr algn="ctr"/>
+          </a:p>
+        </p:txBody>
+      </p:sp>
+      <p:sp>
+        <p:nvSpPr>
+          <p:cNvPr id="4" name="TextBox 3"/>
+          <p:cNvSpPr txBox="1"/>
+          <p:nvPr/>
+        </p:nvSpPr>
+        <p:spPr>
+          <a:xfrm>
+            <a:off x="685800" y="109728"/>
+            <a:ext cx="10817352" cy="228600"/>
+          </a:xfrm>
+          <a:prstGeom prst="rect">
+            <a:avLst/>
+          </a:prstGeom>
+          <a:noFill/>
+        </p:spPr>
+        <p:txBody>
+          <a:bodyPr wrap="none">
+            <a:spAutoFit/>
+          </a:bodyPr>
+          <a:lstStyle/>
+          <a:p>
+            <a:pPr algn="l"/>
+            <a:r>
+              <a:rPr sz="750">
+                <a:solidFill>
+                  <a:srgbClr val="78808C"/>
+                </a:solidFill>
+                <a:latin typeface="Consolas"/>
+              </a:rPr>
+              <a:t>VA09  ·  INHALT</a:t>
+            </a:r>
+          </a:p>
+        </p:txBody>
+      </p:sp>
+      <p:sp>
+        <p:nvSpPr>
+          <p:cNvPr id="5" name="Rectangle 4"/>
+          <p:cNvSpPr/>
+          <p:nvPr/>
+        </p:nvSpPr>
+        <p:spPr>
+          <a:xfrm>
+            <a:off x="0" y="1234440"/>
+            <a:ext cx="12188952" cy="12700"/>
+          </a:xfrm>
+          <a:prstGeom prst="rect">
+            <a:avLst/>
+          </a:prstGeom>
+          <a:solidFill>
+            <a:srgbClr val="D8DFE4"/>
+          </a:solidFill>
+          <a:ln>
+            <a:noFill/>
+          </a:ln>
+        </p:spPr>
+        <p:style>
+          <a:lnRef idx="1">
+            <a:schemeClr val="accent1"/>
+          </a:lnRef>
+          <a:fillRef idx="3">
+            <a:schemeClr val="accent1"/>
+          </a:fillRef>
+          <a:effectRef idx="2">
+            <a:schemeClr val="accent1"/>
+          </a:effectRef>
+          <a:fontRef idx="minor">
+            <a:schemeClr val="lt1"/>
+          </a:fontRef>
+        </p:style>
+        <p:txBody>
+          <a:bodyPr rtlCol="0" anchor="ctr"/>
+          <a:lstStyle/>
+          <a:p>
+            <a:pPr algn="ctr"/>
+          </a:p>
+        </p:txBody>
+      </p:sp>
+      <p:sp>
+        <p:nvSpPr>
+          <p:cNvPr id="6" name="Rectangle 5"/>
+          <p:cNvSpPr/>
+          <p:nvPr/>
+        </p:nvSpPr>
+        <p:spPr>
+          <a:xfrm>
+            <a:off x="685800" y="502920"/>
+            <a:ext cx="36576" cy="658368"/>
+          </a:xfrm>
+          <a:prstGeom prst="rect">
+            <a:avLst/>
+          </a:prstGeom>
+          <a:solidFill>
+            <a:srgbClr val="D9C089"/>
+          </a:solidFill>
+          <a:ln>
+            <a:noFill/>
+          </a:ln>
+        </p:spPr>
+        <p:style>
+          <a:lnRef idx="1">
+            <a:schemeClr val="accent1"/>
+          </a:lnRef>
+          <a:fillRef idx="3">
+            <a:schemeClr val="accent1"/>
+          </a:fillRef>
+          <a:effectRef idx="2">
+            <a:schemeClr val="accent1"/>
+          </a:effectRef>
+          <a:fontRef idx="minor">
+            <a:schemeClr val="lt1"/>
+          </a:fontRef>
+        </p:style>
+        <p:txBody>
+          <a:bodyPr rtlCol="0" anchor="ctr"/>
+          <a:lstStyle/>
+          <a:p>
+            <a:pPr algn="ctr"/>
+          </a:p>
+        </p:txBody>
+      </p:sp>
+      <p:sp>
+        <p:nvSpPr>
+          <p:cNvPr id="7" name="TextBox 6"/>
+          <p:cNvSpPr txBox="1"/>
+          <p:nvPr/>
+        </p:nvSpPr>
+        <p:spPr>
+          <a:xfrm>
+            <a:off x="813816" y="502920"/>
+            <a:ext cx="10634472" cy="685800"/>
+          </a:xfrm>
+          <a:prstGeom prst="rect">
+            <a:avLst/>
+          </a:prstGeom>
+          <a:noFill/>
+        </p:spPr>
+        <p:txBody>
+          <a:bodyPr wrap="square">
+            <a:spAutoFit/>
+          </a:bodyPr>
+          <a:lstStyle/>
+          <a:p>
+            <a:pPr algn="l"/>
+            <a:r>
+              <a:rPr sz="2400" b="1" i="0">
+                <a:solidFill>
+                  <a:srgbClr val="1F2C56"/>
+                </a:solidFill>
+                <a:latin typeface="Arial"/>
+              </a:rPr>
+              <a:t>Reflexionsfragen</a:t>
+            </a:r>
+          </a:p>
+        </p:txBody>
+      </p:sp>
+      <p:sp>
+        <p:nvSpPr>
+          <p:cNvPr id="8" name="TextBox 7"/>
+          <p:cNvSpPr txBox="1"/>
+          <p:nvPr/>
+        </p:nvSpPr>
+        <p:spPr>
+          <a:xfrm>
+            <a:off x="685800" y="1417320"/>
+            <a:ext cx="10817352" cy="4892040"/>
+          </a:xfrm>
+          <a:prstGeom prst="rect">
+            <a:avLst/>
+          </a:prstGeom>
+          <a:noFill/>
+        </p:spPr>
+        <p:txBody>
+          <a:bodyPr wrap="square" anchor="ctr">
+            <a:spAutoFit/>
+          </a:bodyPr>
+          <a:lstStyle/>
+          <a:p>
+            <a:pPr marL="190500" indent="-190500">
+              <a:spcBef>
+                <a:spcPts val="400"/>
+              </a:spcBef>
+              <a:spcAft>
+                <a:spcPts val="200"/>
+              </a:spcAft>
+            </a:pPr>
+            <a:r>
+              <a:rPr sz="1300">
+                <a:solidFill>
+                  <a:srgbClr val="3D5466"/>
+                </a:solidFill>
+                <a:latin typeface="Arial"/>
+              </a:rPr>
+              <a:t>▸  Welchen Anlass in Ihrem Portfolio würden Sie morgen früh als ersten aufbereiten?</a:t>
+            </a:r>
+          </a:p>
+          <a:p>
+            <a:pPr marL="190500" indent="-190500">
+              <a:spcBef>
+                <a:spcPts val="400"/>
+              </a:spcBef>
+              <a:spcAft>
+                <a:spcPts val="200"/>
+              </a:spcAft>
+            </a:pPr>
+            <a:r>
+              <a:rPr sz="1300">
+                <a:solidFill>
+                  <a:srgbClr val="3D5466"/>
+                </a:solidFill>
+                <a:latin typeface="Arial"/>
+              </a:rPr>
+              <a:t>▸  Wo haben Sie zuletzt Datenrauschen für einen Anlass gehalten – oder umgekehrt?</a:t>
+            </a:r>
+          </a:p>
+          <a:p>
+            <a:pPr marL="190500" indent="-190500">
+              <a:spcBef>
+                <a:spcPts val="400"/>
+              </a:spcBef>
+              <a:spcAft>
+                <a:spcPts val="200"/>
+              </a:spcAft>
+            </a:pPr>
+            <a:r>
+              <a:rPr sz="1300">
+                <a:solidFill>
+                  <a:srgbClr val="3D5466"/>
+                </a:solidFill>
+                <a:latin typeface="Arial"/>
+              </a:rPr>
+              <a:t>▸  Was bringen Sie aus diesem Track als Erstes in Ihr Team ein?</a:t>
+            </a:r>
+          </a:p>
+        </p:txBody>
+      </p:sp>
+      <p:sp>
+        <p:nvSpPr>
+          <p:cNvPr id="9" name="Rectangle 8"/>
+          <p:cNvSpPr/>
+          <p:nvPr/>
+        </p:nvSpPr>
+        <p:spPr>
+          <a:xfrm>
+            <a:off x="0" y="6510528"/>
+            <a:ext cx="12188952" cy="347472"/>
+          </a:xfrm>
+          <a:prstGeom prst="rect">
+            <a:avLst/>
+          </a:prstGeom>
+          <a:solidFill>
+            <a:srgbClr val="0A1937"/>
+          </a:solidFill>
+          <a:ln>
+            <a:noFill/>
+          </a:ln>
+        </p:spPr>
+        <p:style>
+          <a:lnRef idx="1">
+            <a:schemeClr val="accent1"/>
+          </a:lnRef>
+          <a:fillRef idx="3">
+            <a:schemeClr val="accent1"/>
+          </a:fillRef>
+          <a:effectRef idx="2">
+            <a:schemeClr val="accent1"/>
+          </a:effectRef>
+          <a:fontRef idx="minor">
+            <a:schemeClr val="lt1"/>
+          </a:fontRef>
+        </p:style>
+        <p:txBody>
+          <a:bodyPr rtlCol="0" anchor="ctr"/>
+          <a:lstStyle/>
+          <a:p>
+            <a:pPr algn="ctr"/>
+          </a:p>
+        </p:txBody>
+      </p:sp>
+      <p:sp>
+        <p:nvSpPr>
+          <p:cNvPr id="10" name="TextBox 9"/>
+          <p:cNvSpPr txBox="1"/>
+          <p:nvPr/>
+        </p:nvSpPr>
+        <p:spPr>
+          <a:xfrm>
+            <a:off x="685800" y="6583680"/>
+            <a:ext cx="6490411" cy="256032"/>
+          </a:xfrm>
+          <a:prstGeom prst="rect">
+            <a:avLst/>
+          </a:prstGeom>
+          <a:noFill/>
+        </p:spPr>
+        <p:txBody>
+          <a:bodyPr wrap="none">
+            <a:spAutoFit/>
+          </a:bodyPr>
+          <a:lstStyle/>
+          <a:p>
+            <a:pPr algn="l"/>
+            <a:r>
+              <a:rPr sz="700">
+                <a:solidFill>
+                  <a:srgbClr val="A0B4D2"/>
+                </a:solidFill>
+                <a:latin typeface="Consolas"/>
+              </a:rPr>
+              <a:t>FKB Campus  ·  VA09</a:t>
+            </a:r>
+          </a:p>
+        </p:txBody>
+      </p:sp>
+    </p:spTree>
+  </p:cSld>
+  <p:clrMapOvr>
+    <a:masterClrMapping/>
+  </p:clrMapOvr>
+</p:sld>
+</file>
+
 <file path=ppt/slides/slide2.xml><?xml version="1.0" encoding="utf-8"?>
 <p:sld xmlns:a="http://schemas.openxmlformats.org/drawingml/2006/main" xmlns:p="http://schemas.openxmlformats.org/presentationml/2006/main" xmlns:r="http://schemas.openxmlformats.org/officeDocument/2006/relationships">
   <p:cSld>
@@ -5831,7 +8936,7 @@
             <a:avLst/>
           </a:prstGeom>
           <a:solidFill>
-            <a:srgbClr val="EDEDF3"/>
+            <a:srgbClr val="1F2C56"/>
           </a:solidFill>
           <a:ln>
             <a:noFill/>
@@ -5861,57 +8966,14 @@
       </p:sp>
       <p:sp>
         <p:nvSpPr>
-          <p:cNvPr id="3" name="Rectangle 2"/>
-          <p:cNvSpPr/>
-          <p:nvPr/>
-        </p:nvSpPr>
-        <p:spPr>
-          <a:xfrm>
-            <a:off x="0" y="0"/>
-            <a:ext cx="12188952" cy="50292"/>
-          </a:xfrm>
-          <a:prstGeom prst="rect">
-            <a:avLst/>
-          </a:prstGeom>
-          <a:solidFill>
-            <a:srgbClr val="1F2C56"/>
-          </a:solidFill>
-          <a:ln>
-            <a:noFill/>
-          </a:ln>
-        </p:spPr>
-        <p:style>
-          <a:lnRef idx="1">
-            <a:schemeClr val="accent1"/>
-          </a:lnRef>
-          <a:fillRef idx="3">
-            <a:schemeClr val="accent1"/>
-          </a:fillRef>
-          <a:effectRef idx="2">
-            <a:schemeClr val="accent1"/>
-          </a:effectRef>
-          <a:fontRef idx="minor">
-            <a:schemeClr val="lt1"/>
-          </a:fontRef>
-        </p:style>
-        <p:txBody>
-          <a:bodyPr rtlCol="0" anchor="ctr"/>
-          <a:lstStyle/>
-          <a:p>
-            <a:pPr algn="ctr"/>
-          </a:p>
-        </p:txBody>
-      </p:sp>
-      <p:sp>
-        <p:nvSpPr>
-          <p:cNvPr id="4" name="TextBox 3"/>
+          <p:cNvPr id="3" name="TextBox 2"/>
           <p:cNvSpPr txBox="1"/>
           <p:nvPr/>
         </p:nvSpPr>
         <p:spPr>
           <a:xfrm>
-            <a:off x="685800" y="109728"/>
-            <a:ext cx="10817352" cy="228600"/>
+            <a:off x="685800" y="2377440"/>
+            <a:ext cx="10817352" cy="365760"/>
           </a:xfrm>
           <a:prstGeom prst="rect">
             <a:avLst/>
@@ -5926,70 +8988,27 @@
           <a:p>
             <a:pPr algn="l"/>
             <a:r>
-              <a:rPr sz="750">
-                <a:solidFill>
-                  <a:srgbClr val="78808C"/>
+              <a:rPr sz="1200">
+                <a:solidFill>
+                  <a:srgbClr val="D9C089"/>
                 </a:solidFill>
                 <a:latin typeface="Consolas"/>
               </a:rPr>
-              <a:t>VA09  ·  INHALT</a:t>
-            </a:r>
-          </a:p>
-        </p:txBody>
-      </p:sp>
-      <p:sp>
-        <p:nvSpPr>
-          <p:cNvPr id="5" name="Rectangle 4"/>
+              <a:t>00:05–00:20</a:t>
+            </a:r>
+          </a:p>
+        </p:txBody>
+      </p:sp>
+      <p:sp>
+        <p:nvSpPr>
+          <p:cNvPr id="4" name="Rectangle 3"/>
           <p:cNvSpPr/>
           <p:nvPr/>
         </p:nvSpPr>
         <p:spPr>
           <a:xfrm>
-            <a:off x="0" y="1234440"/>
-            <a:ext cx="12188952" cy="12700"/>
-          </a:xfrm>
-          <a:prstGeom prst="rect">
-            <a:avLst/>
-          </a:prstGeom>
-          <a:solidFill>
-            <a:srgbClr val="D8DFE4"/>
-          </a:solidFill>
-          <a:ln>
-            <a:noFill/>
-          </a:ln>
-        </p:spPr>
-        <p:style>
-          <a:lnRef idx="1">
-            <a:schemeClr val="accent1"/>
-          </a:lnRef>
-          <a:fillRef idx="3">
-            <a:schemeClr val="accent1"/>
-          </a:fillRef>
-          <a:effectRef idx="2">
-            <a:schemeClr val="accent1"/>
-          </a:effectRef>
-          <a:fontRef idx="minor">
-            <a:schemeClr val="lt1"/>
-          </a:fontRef>
-        </p:style>
-        <p:txBody>
-          <a:bodyPr rtlCol="0" anchor="ctr"/>
-          <a:lstStyle/>
-          <a:p>
-            <a:pPr algn="ctr"/>
-          </a:p>
-        </p:txBody>
-      </p:sp>
-      <p:sp>
-        <p:nvSpPr>
-          <p:cNvPr id="6" name="Rectangle 5"/>
-          <p:cNvSpPr/>
-          <p:nvPr/>
-        </p:nvSpPr>
-        <p:spPr>
-          <a:xfrm>
-            <a:off x="685800" y="502920"/>
-            <a:ext cx="36576" cy="658368"/>
+            <a:off x="685800" y="2788920"/>
+            <a:ext cx="548640" cy="38100"/>
           </a:xfrm>
           <a:prstGeom prst="rect">
             <a:avLst/>
@@ -6025,14 +9044,14 @@
       </p:sp>
       <p:sp>
         <p:nvSpPr>
-          <p:cNvPr id="7" name="TextBox 6"/>
+          <p:cNvPr id="5" name="TextBox 4"/>
           <p:cNvSpPr txBox="1"/>
           <p:nvPr/>
         </p:nvSpPr>
         <p:spPr>
           <a:xfrm>
-            <a:off x="813816" y="502920"/>
-            <a:ext cx="10634472" cy="685800"/>
+            <a:off x="685800" y="3017520"/>
+            <a:ext cx="10817352" cy="1463040"/>
           </a:xfrm>
           <a:prstGeom prst="rect">
             <a:avLst/>
@@ -6047,27 +9066,27 @@
           <a:p>
             <a:pPr algn="l"/>
             <a:r>
-              <a:rPr sz="2400" b="1" i="0">
-                <a:solidFill>
-                  <a:srgbClr val="1F2C56"/>
+              <a:rPr sz="4000" b="1" i="0">
+                <a:solidFill>
+                  <a:srgbClr val="FFFFFF"/>
                 </a:solidFill>
                 <a:latin typeface="Arial"/>
               </a:rPr>
-              <a:t>Theorie-Input: Anlässe und der Hausbankvorteil</a:t>
-            </a:r>
-          </a:p>
-        </p:txBody>
-      </p:sp>
-      <p:sp>
-        <p:nvSpPr>
-          <p:cNvPr id="8" name="TextBox 7"/>
+              <a:t>Theorie-Input 1</a:t>
+            </a:r>
+          </a:p>
+        </p:txBody>
+      </p:sp>
+      <p:sp>
+        <p:nvSpPr>
+          <p:cNvPr id="6" name="TextBox 5"/>
           <p:cNvSpPr txBox="1"/>
           <p:nvPr/>
         </p:nvSpPr>
         <p:spPr>
           <a:xfrm>
-            <a:off x="685800" y="1417320"/>
-            <a:ext cx="10817352" cy="4892040"/>
+            <a:off x="685800" y="4480560"/>
+            <a:ext cx="8653881" cy="1280160"/>
           </a:xfrm>
           <a:prstGeom prst="rect">
             <a:avLst/>
@@ -6075,84 +9094,34 @@
           <a:noFill/>
         </p:spPr>
         <p:txBody>
-          <a:bodyPr wrap="square" anchor="ctr">
+          <a:bodyPr wrap="square">
             <a:spAutoFit/>
           </a:bodyPr>
           <a:lstStyle/>
           <a:p>
-            <a:pPr marL="190500" indent="-190500">
-              <a:spcBef>
-                <a:spcPts val="400"/>
-              </a:spcBef>
-              <a:spcAft>
-                <a:spcPts val="200"/>
-              </a:spcAft>
-            </a:pPr>
-            <a:r>
-              <a:rPr sz="1300">
-                <a:solidFill>
-                  <a:srgbClr val="3D5466"/>
+            <a:pPr algn="l"/>
+            <a:r>
+              <a:rPr sz="1600" b="0" i="0">
+                <a:solidFill>
+                  <a:srgbClr val="C8D2E6"/>
                 </a:solidFill>
                 <a:latin typeface="Arial"/>
               </a:rPr>
-              <a:t>▸  Typische Anlasstypen:</a:t>
-            </a:r>
-          </a:p>
-        </p:txBody>
-      </p:sp>
-      <p:sp>
-        <p:nvSpPr>
-          <p:cNvPr id="9" name="Rectangle 8"/>
-          <p:cNvSpPr/>
-          <p:nvPr/>
-        </p:nvSpPr>
-        <p:spPr>
-          <a:xfrm>
-            <a:off x="0" y="6510528"/>
-            <a:ext cx="12188952" cy="347472"/>
-          </a:xfrm>
-          <a:prstGeom prst="rect">
-            <a:avLst/>
-          </a:prstGeom>
-          <a:solidFill>
-            <a:srgbClr val="0A1937"/>
-          </a:solidFill>
-          <a:ln>
-            <a:noFill/>
-          </a:ln>
-        </p:spPr>
-        <p:style>
-          <a:lnRef idx="1">
-            <a:schemeClr val="accent1"/>
-          </a:lnRef>
-          <a:fillRef idx="3">
-            <a:schemeClr val="accent1"/>
-          </a:fillRef>
-          <a:effectRef idx="2">
-            <a:schemeClr val="accent1"/>
-          </a:effectRef>
-          <a:fontRef idx="minor">
-            <a:schemeClr val="lt1"/>
-          </a:fontRef>
-        </p:style>
-        <p:txBody>
-          <a:bodyPr rtlCol="0" anchor="ctr"/>
-          <a:lstStyle/>
-          <a:p>
-            <a:pPr algn="ctr"/>
-          </a:p>
-        </p:txBody>
-      </p:sp>
-      <p:sp>
-        <p:nvSpPr>
-          <p:cNvPr id="10" name="TextBox 9"/>
+              <a:t>Den Hausbankvorteil nutzen – die typischen Vertriebsanlässe kennen.</a:t>
+            </a:r>
+          </a:p>
+        </p:txBody>
+      </p:sp>
+      <p:sp>
+        <p:nvSpPr>
+          <p:cNvPr id="7" name="TextBox 6"/>
           <p:cNvSpPr txBox="1"/>
           <p:nvPr/>
         </p:nvSpPr>
         <p:spPr>
           <a:xfrm>
-            <a:off x="685800" y="6583680"/>
-            <a:ext cx="6490411" cy="256032"/>
+            <a:off x="685800" y="6355080"/>
+            <a:ext cx="10817352" cy="274320"/>
           </a:xfrm>
           <a:prstGeom prst="rect">
             <a:avLst/>
@@ -6169,7 +9138,7 @@
             <a:r>
               <a:rPr sz="700">
                 <a:solidFill>
-                  <a:srgbClr val="A0B4D2"/>
+                  <a:srgbClr val="8CA0C3"/>
                 </a:solidFill>
                 <a:latin typeface="Consolas"/>
               </a:rPr>
@@ -6211,7 +9180,7 @@
             <a:avLst/>
           </a:prstGeom>
           <a:solidFill>
-            <a:srgbClr val="FFFFFF"/>
+            <a:srgbClr val="EDEDF3"/>
           </a:solidFill>
           <a:ln>
             <a:noFill/>
@@ -6312,43 +9281,51 @@
                 </a:solidFill>
                 <a:latin typeface="Consolas"/>
               </a:rPr>
-              <a:t>VA09  ·  ÜBERSICHT</a:t>
-            </a:r>
-          </a:p>
-        </p:txBody>
-      </p:sp>
-      <p:sp>
-        <p:nvSpPr>
-          <p:cNvPr id="5" name="TextBox 4"/>
-          <p:cNvSpPr txBox="1"/>
-          <p:nvPr/>
-        </p:nvSpPr>
-        <p:spPr>
-          <a:xfrm>
-            <a:off x="685800" y="502920"/>
-            <a:ext cx="10817352" cy="594360"/>
-          </a:xfrm>
-          <a:prstGeom prst="rect">
-            <a:avLst/>
-          </a:prstGeom>
-          <a:noFill/>
-        </p:spPr>
-        <p:txBody>
-          <a:bodyPr wrap="square">
-            <a:spAutoFit/>
-          </a:bodyPr>
-          <a:lstStyle/>
-          <a:p>
-            <a:pPr algn="l"/>
-            <a:r>
-              <a:rPr sz="2000" b="1" i="0">
-                <a:solidFill>
-                  <a:srgbClr val="1F2C56"/>
-                </a:solidFill>
-                <a:latin typeface="Arial"/>
-              </a:rPr>
-              <a:t>Theorie-Input: Anlässe und der Hausbankvorteil</a:t>
-            </a:r>
+              <a:t>VA09  ·  INHALT</a:t>
+            </a:r>
+          </a:p>
+        </p:txBody>
+      </p:sp>
+      <p:sp>
+        <p:nvSpPr>
+          <p:cNvPr id="5" name="Rectangle 4"/>
+          <p:cNvSpPr/>
+          <p:nvPr/>
+        </p:nvSpPr>
+        <p:spPr>
+          <a:xfrm>
+            <a:off x="0" y="1234440"/>
+            <a:ext cx="12188952" cy="12700"/>
+          </a:xfrm>
+          <a:prstGeom prst="rect">
+            <a:avLst/>
+          </a:prstGeom>
+          <a:solidFill>
+            <a:srgbClr val="D8DFE4"/>
+          </a:solidFill>
+          <a:ln>
+            <a:noFill/>
+          </a:ln>
+        </p:spPr>
+        <p:style>
+          <a:lnRef idx="1">
+            <a:schemeClr val="accent1"/>
+          </a:lnRef>
+          <a:fillRef idx="3">
+            <a:schemeClr val="accent1"/>
+          </a:fillRef>
+          <a:effectRef idx="2">
+            <a:schemeClr val="accent1"/>
+          </a:effectRef>
+          <a:fontRef idx="minor">
+            <a:schemeClr val="lt1"/>
+          </a:fontRef>
+        </p:style>
+        <p:txBody>
+          <a:bodyPr rtlCol="0" anchor="ctr"/>
+          <a:lstStyle/>
+          <a:p>
+            <a:pPr algn="ctr"/>
           </a:p>
         </p:txBody>
       </p:sp>
@@ -6360,8 +9337,8 @@
         </p:nvSpPr>
         <p:spPr>
           <a:xfrm>
-            <a:off x="685800" y="1143000"/>
-            <a:ext cx="10817352" cy="25400"/>
+            <a:off x="685800" y="502920"/>
+            <a:ext cx="36576" cy="658368"/>
           </a:xfrm>
           <a:prstGeom prst="rect">
             <a:avLst/>
@@ -6395,440 +9372,143 @@
           </a:p>
         </p:txBody>
       </p:sp>
-      <p:graphicFrame>
-        <p:nvGraphicFramePr>
-          <p:cNvPr id="7" name="Table 6"/>
-          <p:cNvGraphicFramePr>
-            <a:graphicFrameLocks noGrp="1"/>
-          </p:cNvGraphicFramePr>
-          <p:nvPr/>
-        </p:nvGraphicFramePr>
-        <p:xfrm>
-          <a:off x="685800" y="1417320"/>
-          <a:ext cx="10817352" cy="2688336"/>
-        </p:xfrm>
-        <a:graphic>
-          <a:graphicData uri="http://schemas.openxmlformats.org/drawingml/2006/table">
-            <a:tbl>
-              <a:tblPr firstRow="1" bandRow="1">
-                <a:tableStyleId>{5C22544A-7EE6-4342-B048-85BDC9FD1C3A}</a:tableStyleId>
-              </a:tblPr>
-              <a:tblGrid>
-                <a:gridCol w="3605784"/>
-                <a:gridCol w="3605784"/>
-                <a:gridCol w="3605784"/>
-              </a:tblGrid>
-              <a:tr h="384048">
-                <a:tc>
-                  <a:txBody>
-                    <a:bodyPr/>
-                    <a:lstStyle/>
-                    <a:p>
-                      <a:r>
-                        <a:rPr sz="1100" b="1">
-                          <a:solidFill>
-                            <a:srgbClr val="FFFFFF"/>
-                          </a:solidFill>
-                          <a:latin typeface="Arial"/>
-                        </a:rPr>
-                        <a:t>Signal</a:t>
-                      </a:r>
-                    </a:p>
-                  </a:txBody>
-                  <a:tcPr>
-                    <a:solidFill>
-                      <a:srgbClr val="1F2C56"/>
-                    </a:solidFill>
-                  </a:tcPr>
-                </a:tc>
-                <a:tc>
-                  <a:txBody>
-                    <a:bodyPr/>
-                    <a:lstStyle/>
-                    <a:p>
-                      <a:r>
-                        <a:rPr sz="1100" b="1">
-                          <a:solidFill>
-                            <a:srgbClr val="FFFFFF"/>
-                          </a:solidFill>
-                          <a:latin typeface="Arial"/>
-                        </a:rPr>
-                        <a:t>Möglicher Bedarf</a:t>
-                      </a:r>
-                    </a:p>
-                  </a:txBody>
-                  <a:tcPr>
-                    <a:solidFill>
-                      <a:srgbClr val="1F2C56"/>
-                    </a:solidFill>
-                  </a:tcPr>
-                </a:tc>
-                <a:tc>
-                  <a:txBody>
-                    <a:bodyPr/>
-                    <a:lstStyle/>
-                    <a:p>
-                      <a:r>
-                        <a:rPr sz="1100" b="1">
-                          <a:solidFill>
-                            <a:srgbClr val="FFFFFF"/>
-                          </a:solidFill>
-                          <a:latin typeface="Arial"/>
-                        </a:rPr>
-                        <a:t>Verbund/Produkt</a:t>
-                      </a:r>
-                    </a:p>
-                  </a:txBody>
-                  <a:tcPr>
-                    <a:solidFill>
-                      <a:srgbClr val="1F2C56"/>
-                    </a:solidFill>
-                  </a:tcPr>
-                </a:tc>
-              </a:tr>
-              <a:tr h="384048">
-                <a:tc>
-                  <a:txBody>
-                    <a:bodyPr/>
-                    <a:lstStyle/>
-                    <a:p>
-                      <a:r>
-                        <a:rPr sz="1050">
-                          <a:solidFill>
-                            <a:srgbClr val="3D5466"/>
-                          </a:solidFill>
-                          <a:latin typeface="Arial"/>
-                        </a:rPr>
-                        <a:t>Kreditlinie dauerhaft hoch ausgelastet</a:t>
-                      </a:r>
-                    </a:p>
-                  </a:txBody>
-                  <a:tcPr/>
-                </a:tc>
-                <a:tc>
-                  <a:txBody>
-                    <a:bodyPr/>
-                    <a:lstStyle/>
-                    <a:p>
-                      <a:r>
-                        <a:rPr sz="1050">
-                          <a:solidFill>
-                            <a:srgbClr val="3D5466"/>
-                          </a:solidFill>
-                          <a:latin typeface="Arial"/>
-                        </a:rPr>
-                        <a:t>Erweiterung / Umstrukturierung</a:t>
-                      </a:r>
-                    </a:p>
-                  </a:txBody>
-                  <a:tcPr/>
-                </a:tc>
-                <a:tc>
-                  <a:txBody>
-                    <a:bodyPr/>
-                    <a:lstStyle/>
-                    <a:p>
-                      <a:r>
-                        <a:rPr sz="1050">
-                          <a:solidFill>
-                            <a:srgbClr val="3D5466"/>
-                          </a:solidFill>
-                          <a:latin typeface="Arial"/>
-                        </a:rPr>
-                        <a:t>Kredit, Betriebsmittel</a:t>
-                      </a:r>
-                    </a:p>
-                  </a:txBody>
-                  <a:tcPr/>
-                </a:tc>
-              </a:tr>
-              <a:tr h="384048">
-                <a:tc>
-                  <a:txBody>
-                    <a:bodyPr/>
-                    <a:lstStyle/>
-                    <a:p>
-                      <a:r>
-                        <a:rPr sz="1050">
-                          <a:solidFill>
-                            <a:srgbClr val="3D5466"/>
-                          </a:solidFill>
-                          <a:latin typeface="Arial"/>
-                        </a:rPr>
-                        <a:t>Zinsbindung läuft aus</a:t>
-                      </a:r>
-                    </a:p>
-                  </a:txBody>
-                  <a:tcPr/>
-                </a:tc>
-                <a:tc>
-                  <a:txBody>
-                    <a:bodyPr/>
-                    <a:lstStyle/>
-                    <a:p>
-                      <a:r>
-                        <a:rPr sz="1050">
-                          <a:solidFill>
-                            <a:srgbClr val="3D5466"/>
-                          </a:solidFill>
-                          <a:latin typeface="Arial"/>
-                        </a:rPr>
-                        <a:t>Prolongation / Umschuldung</a:t>
-                      </a:r>
-                    </a:p>
-                  </a:txBody>
-                  <a:tcPr/>
-                </a:tc>
-                <a:tc>
-                  <a:txBody>
-                    <a:bodyPr/>
-                    <a:lstStyle/>
-                    <a:p>
-                      <a:r>
-                        <a:rPr sz="1050">
-                          <a:solidFill>
-                            <a:srgbClr val="3D5466"/>
-                          </a:solidFill>
-                          <a:latin typeface="Arial"/>
-                        </a:rPr>
-                        <a:t>Kredit</a:t>
-                      </a:r>
-                    </a:p>
-                  </a:txBody>
-                  <a:tcPr/>
-                </a:tc>
-              </a:tr>
-              <a:tr h="384048">
-                <a:tc>
-                  <a:txBody>
-                    <a:bodyPr/>
-                    <a:lstStyle/>
-                    <a:p>
-                      <a:r>
-                        <a:rPr sz="1050">
-                          <a:solidFill>
-                            <a:srgbClr val="3D5466"/>
-                          </a:solidFill>
-                          <a:latin typeface="Arial"/>
-                        </a:rPr>
-                        <a:t>Hohe, ungenutzte Liquidität</a:t>
-                      </a:r>
-                    </a:p>
-                  </a:txBody>
-                  <a:tcPr/>
-                </a:tc>
-                <a:tc>
-                  <a:txBody>
-                    <a:bodyPr/>
-                    <a:lstStyle/>
-                    <a:p>
-                      <a:r>
-                        <a:rPr sz="1050">
-                          <a:solidFill>
-                            <a:srgbClr val="3D5466"/>
-                          </a:solidFill>
-                          <a:latin typeface="Arial"/>
-                        </a:rPr>
-                        <a:t>Anlage / Geldanlage</a:t>
-                      </a:r>
-                    </a:p>
-                  </a:txBody>
-                  <a:tcPr/>
-                </a:tc>
-                <a:tc>
-                  <a:txBody>
-                    <a:bodyPr/>
-                    <a:lstStyle/>
-                    <a:p>
-                      <a:r>
-                        <a:rPr sz="1050">
-                          <a:solidFill>
-                            <a:srgbClr val="3D5466"/>
-                          </a:solidFill>
-                          <a:latin typeface="Arial"/>
-                        </a:rPr>
-                        <a:t>Union Investment, Festgeld</a:t>
-                      </a:r>
-                    </a:p>
-                  </a:txBody>
-                  <a:tcPr/>
-                </a:tc>
-              </a:tr>
-              <a:tr h="384048">
-                <a:tc>
-                  <a:txBody>
-                    <a:bodyPr/>
-                    <a:lstStyle/>
-                    <a:p>
-                      <a:r>
-                        <a:rPr sz="1050">
-                          <a:solidFill>
-                            <a:srgbClr val="3D5466"/>
-                          </a:solidFill>
-                          <a:latin typeface="Arial"/>
-                        </a:rPr>
-                        <a:t>Inhaber 60+ ohne Nachfolge</a:t>
-                      </a:r>
-                    </a:p>
-                  </a:txBody>
-                  <a:tcPr/>
-                </a:tc>
-                <a:tc>
-                  <a:txBody>
-                    <a:bodyPr/>
-                    <a:lstStyle/>
-                    <a:p>
-                      <a:r>
-                        <a:rPr sz="1050">
-                          <a:solidFill>
-                            <a:srgbClr val="3D5466"/>
-                          </a:solidFill>
-                          <a:latin typeface="Arial"/>
-                        </a:rPr>
-                        <a:t>Nachfolge / Bewertung</a:t>
-                      </a:r>
-                    </a:p>
-                  </a:txBody>
-                  <a:tcPr/>
-                </a:tc>
-                <a:tc>
-                  <a:txBody>
-                    <a:bodyPr/>
-                    <a:lstStyle/>
-                    <a:p>
-                      <a:r>
-                        <a:rPr sz="1050">
-                          <a:solidFill>
-                            <a:srgbClr val="3D5466"/>
-                          </a:solidFill>
-                          <a:latin typeface="Arial"/>
-                        </a:rPr>
-                        <a:t>DZ Bank M&amp;A (→ M12/M24)</a:t>
-                      </a:r>
-                    </a:p>
-                  </a:txBody>
-                  <a:tcPr/>
-                </a:tc>
-              </a:tr>
-              <a:tr h="384048">
-                <a:tc>
-                  <a:txBody>
-                    <a:bodyPr/>
-                    <a:lstStyle/>
-                    <a:p>
-                      <a:r>
-                        <a:rPr sz="1050">
-                          <a:solidFill>
-                            <a:srgbClr val="3D5466"/>
-                          </a:solidFill>
-                          <a:latin typeface="Arial"/>
-                        </a:rPr>
-                        <a:t>Investition angedeutet</a:t>
-                      </a:r>
-                    </a:p>
-                  </a:txBody>
-                  <a:tcPr/>
-                </a:tc>
-                <a:tc>
-                  <a:txBody>
-                    <a:bodyPr/>
-                    <a:lstStyle/>
-                    <a:p>
-                      <a:r>
-                        <a:rPr sz="1050">
-                          <a:solidFill>
-                            <a:srgbClr val="3D5466"/>
-                          </a:solidFill>
-                          <a:latin typeface="Arial"/>
-                        </a:rPr>
-                        <a:t>Finanzierung / Förderung</a:t>
-                      </a:r>
-                    </a:p>
-                  </a:txBody>
-                  <a:tcPr/>
-                </a:tc>
-                <a:tc>
-                  <a:txBody>
-                    <a:bodyPr/>
-                    <a:lstStyle/>
-                    <a:p>
-                      <a:r>
-                        <a:rPr sz="1050">
-                          <a:solidFill>
-                            <a:srgbClr val="3D5466"/>
-                          </a:solidFill>
-                          <a:latin typeface="Arial"/>
-                        </a:rPr>
-                        <a:t>KfW/L-Bank, Leasing</a:t>
-                      </a:r>
-                    </a:p>
-                  </a:txBody>
-                  <a:tcPr/>
-                </a:tc>
-              </a:tr>
-              <a:tr h="384048">
-                <a:tc>
-                  <a:txBody>
-                    <a:bodyPr/>
-                    <a:lstStyle/>
-                    <a:p>
-                      <a:r>
-                        <a:rPr sz="1050">
-                          <a:solidFill>
-                            <a:srgbClr val="3D5466"/>
-                          </a:solidFill>
-                          <a:latin typeface="Arial"/>
-                        </a:rPr>
-                        <a:t>Umsatzwachstum</a:t>
-                      </a:r>
-                    </a:p>
-                  </a:txBody>
-                  <a:tcPr/>
-                </a:tc>
-                <a:tc>
-                  <a:txBody>
-                    <a:bodyPr/>
-                    <a:lstStyle/>
-                    <a:p>
-                      <a:r>
-                        <a:rPr sz="1050">
-                          <a:solidFill>
-                            <a:srgbClr val="3D5466"/>
-                          </a:solidFill>
-                          <a:latin typeface="Arial"/>
-                        </a:rPr>
-                        <a:t>Working-Capital-Bedarf</a:t>
-                      </a:r>
-                    </a:p>
-                  </a:txBody>
-                  <a:tcPr/>
-                </a:tc>
-                <a:tc>
-                  <a:txBody>
-                    <a:bodyPr/>
-                    <a:lstStyle/>
-                    <a:p>
-                      <a:r>
-                        <a:rPr sz="1050">
-                          <a:solidFill>
-                            <a:srgbClr val="3D5466"/>
-                          </a:solidFill>
-                          <a:latin typeface="Arial"/>
-                        </a:rPr>
-                        <a:t>Kontokorrent, Factoring</a:t>
-                      </a:r>
-                    </a:p>
-                  </a:txBody>
-                  <a:tcPr/>
-                </a:tc>
-              </a:tr>
-            </a:tbl>
-          </a:graphicData>
-        </a:graphic>
-      </p:graphicFrame>
-      <p:sp>
-        <p:nvSpPr>
-          <p:cNvPr id="8" name="Rectangle 7"/>
+      <p:sp>
+        <p:nvSpPr>
+          <p:cNvPr id="7" name="TextBox 6"/>
+          <p:cNvSpPr txBox="1"/>
+          <p:nvPr/>
+        </p:nvSpPr>
+        <p:spPr>
+          <a:xfrm>
+            <a:off x="813816" y="502920"/>
+            <a:ext cx="10634472" cy="685800"/>
+          </a:xfrm>
+          <a:prstGeom prst="rect">
+            <a:avLst/>
+          </a:prstGeom>
+          <a:noFill/>
+        </p:spPr>
+        <p:txBody>
+          <a:bodyPr wrap="square">
+            <a:spAutoFit/>
+          </a:bodyPr>
+          <a:lstStyle/>
+          <a:p>
+            <a:pPr algn="l"/>
+            <a:r>
+              <a:rPr sz="2400" b="1" i="0">
+                <a:solidFill>
+                  <a:srgbClr val="1F2C56"/>
+                </a:solidFill>
+                <a:latin typeface="Arial"/>
+              </a:rPr>
+              <a:t>Der Hausbankvorteil: Signale früh sehen</a:t>
+            </a:r>
+          </a:p>
+        </p:txBody>
+      </p:sp>
+      <p:sp>
+        <p:nvSpPr>
+          <p:cNvPr id="8" name="TextBox 7"/>
+          <p:cNvSpPr txBox="1"/>
+          <p:nvPr/>
+        </p:nvSpPr>
+        <p:spPr>
+          <a:xfrm>
+            <a:off x="685800" y="1417320"/>
+            <a:ext cx="10817352" cy="4892040"/>
+          </a:xfrm>
+          <a:prstGeom prst="rect">
+            <a:avLst/>
+          </a:prstGeom>
+          <a:noFill/>
+        </p:spPr>
+        <p:txBody>
+          <a:bodyPr wrap="square" anchor="ctr">
+            <a:spAutoFit/>
+          </a:bodyPr>
+          <a:lstStyle/>
+          <a:p>
+            <a:pPr marL="177800" indent="-177800">
+              <a:spcBef>
+                <a:spcPts val="600"/>
+              </a:spcBef>
+              <a:spcAft>
+                <a:spcPts val="200"/>
+              </a:spcAft>
+            </a:pPr>
+            <a:r>
+              <a:rPr sz="1200" i="1">
+                <a:solidFill>
+                  <a:srgbClr val="3D5466"/>
+                </a:solidFill>
+                <a:latin typeface="Arial"/>
+              </a:rPr>
+              <a:t>→  Relationship Lending (Petersen &amp; Rajan, 1994): Die Hausbank sieht die Daten früher als jeder Wettbewerber – der Innendienst ist das Frühwarnsystem.</a:t>
+            </a:r>
+          </a:p>
+          <a:p>
+            <a:pPr marL="190500" indent="-190500">
+              <a:spcBef>
+                <a:spcPts val="400"/>
+              </a:spcBef>
+              <a:spcAft>
+                <a:spcPts val="200"/>
+              </a:spcAft>
+            </a:pPr>
+            <a:r>
+              <a:rPr sz="1300">
+                <a:solidFill>
+                  <a:srgbClr val="3D5466"/>
+                </a:solidFill>
+                <a:latin typeface="Arial"/>
+              </a:rPr>
+              <a:t>▸  Jedes Signal steht für einen möglichen Bedarf und ein passendes Verbundprodukt.</a:t>
+            </a:r>
+          </a:p>
+          <a:p>
+            <a:pPr marL="190500" indent="-190500">
+              <a:spcBef>
+                <a:spcPts val="400"/>
+              </a:spcBef>
+              <a:spcAft>
+                <a:spcPts val="200"/>
+              </a:spcAft>
+            </a:pPr>
+            <a:r>
+              <a:rPr sz="1300">
+                <a:solidFill>
+                  <a:srgbClr val="3D5466"/>
+                </a:solidFill>
+                <a:latin typeface="Arial"/>
+              </a:rPr>
+              <a:t>▸  Beispiele: dauerhaft ausgelastete Linie, auslaufende Zinsbindung, ungenutzte Liquidität, Inhaber 60+ ohne Nachfolge.</a:t>
+            </a:r>
+          </a:p>
+          <a:p>
+            <a:pPr marL="190500" indent="-190500">
+              <a:spcBef>
+                <a:spcPts val="400"/>
+              </a:spcBef>
+              <a:spcAft>
+                <a:spcPts val="200"/>
+              </a:spcAft>
+            </a:pPr>
+            <a:r>
+              <a:rPr sz="1300">
+                <a:solidFill>
+                  <a:srgbClr val="3D5466"/>
+                </a:solidFill>
+                <a:latin typeface="Arial"/>
+              </a:rPr>
+              <a:t>▸  Der Innendienst erkennt das Signal – der Berater führt das Gespräch.</a:t>
+            </a:r>
+          </a:p>
+        </p:txBody>
+      </p:sp>
+      <p:sp>
+        <p:nvSpPr>
+          <p:cNvPr id="9" name="Rectangle 8"/>
           <p:cNvSpPr/>
           <p:nvPr/>
         </p:nvSpPr>
@@ -6871,7 +9551,7 @@
       </p:sp>
       <p:sp>
         <p:nvSpPr>
-          <p:cNvPr id="9" name="TextBox 8"/>
+          <p:cNvPr id="10" name="TextBox 9"/>
           <p:cNvSpPr txBox="1"/>
           <p:nvPr/>
         </p:nvSpPr>
@@ -6900,41 +9580,6 @@
                 <a:latin typeface="Consolas"/>
               </a:rPr>
               <a:t>FKB Campus  ·  VA09</a:t>
-            </a:r>
-          </a:p>
-        </p:txBody>
-      </p:sp>
-      <p:sp>
-        <p:nvSpPr>
-          <p:cNvPr id="10" name="TextBox 9"/>
-          <p:cNvSpPr txBox="1"/>
-          <p:nvPr/>
-        </p:nvSpPr>
-        <p:spPr>
-          <a:xfrm>
-            <a:off x="7176211" y="6583680"/>
-            <a:ext cx="4326940" cy="256032"/>
-          </a:xfrm>
-          <a:prstGeom prst="rect">
-            <a:avLst/>
-          </a:prstGeom>
-          <a:noFill/>
-        </p:spPr>
-        <p:txBody>
-          <a:bodyPr wrap="none">
-            <a:spAutoFit/>
-          </a:bodyPr>
-          <a:lstStyle/>
-          <a:p>
-            <a:pPr algn="r"/>
-            <a:r>
-              <a:rPr sz="700">
-                <a:solidFill>
-                  <a:srgbClr val="A0B4D2"/>
-                </a:solidFill>
-                <a:latin typeface="Consolas"/>
-              </a:rPr>
-              <a:t>Übersicht</a:t>
             </a:r>
           </a:p>
         </p:txBody>
@@ -6972,7 +9617,7 @@
             <a:avLst/>
           </a:prstGeom>
           <a:solidFill>
-            <a:srgbClr val="EDEDF3"/>
+            <a:srgbClr val="FFFFFF"/>
           </a:solidFill>
           <a:ln>
             <a:noFill/>
@@ -7073,51 +9718,43 @@
                 </a:solidFill>
                 <a:latin typeface="Consolas"/>
               </a:rPr>
-              <a:t>VA09  ·  INHALT</a:t>
-            </a:r>
-          </a:p>
-        </p:txBody>
-      </p:sp>
-      <p:sp>
-        <p:nvSpPr>
-          <p:cNvPr id="5" name="Rectangle 4"/>
-          <p:cNvSpPr/>
-          <p:nvPr/>
-        </p:nvSpPr>
-        <p:spPr>
-          <a:xfrm>
-            <a:off x="0" y="1234440"/>
-            <a:ext cx="12188952" cy="12700"/>
-          </a:xfrm>
-          <a:prstGeom prst="rect">
-            <a:avLst/>
-          </a:prstGeom>
-          <a:solidFill>
-            <a:srgbClr val="D8DFE4"/>
-          </a:solidFill>
-          <a:ln>
-            <a:noFill/>
-          </a:ln>
-        </p:spPr>
-        <p:style>
-          <a:lnRef idx="1">
-            <a:schemeClr val="accent1"/>
-          </a:lnRef>
-          <a:fillRef idx="3">
-            <a:schemeClr val="accent1"/>
-          </a:fillRef>
-          <a:effectRef idx="2">
-            <a:schemeClr val="accent1"/>
-          </a:effectRef>
-          <a:fontRef idx="minor">
-            <a:schemeClr val="lt1"/>
-          </a:fontRef>
-        </p:style>
-        <p:txBody>
-          <a:bodyPr rtlCol="0" anchor="ctr"/>
-          <a:lstStyle/>
-          <a:p>
-            <a:pPr algn="ctr"/>
+              <a:t>VA09  ·  SCHAUBILD</a:t>
+            </a:r>
+          </a:p>
+        </p:txBody>
+      </p:sp>
+      <p:sp>
+        <p:nvSpPr>
+          <p:cNvPr id="5" name="TextBox 4"/>
+          <p:cNvSpPr txBox="1"/>
+          <p:nvPr/>
+        </p:nvSpPr>
+        <p:spPr>
+          <a:xfrm>
+            <a:off x="685800" y="502920"/>
+            <a:ext cx="10817352" cy="594360"/>
+          </a:xfrm>
+          <a:prstGeom prst="rect">
+            <a:avLst/>
+          </a:prstGeom>
+          <a:noFill/>
+        </p:spPr>
+        <p:txBody>
+          <a:bodyPr wrap="square">
+            <a:spAutoFit/>
+          </a:bodyPr>
+          <a:lstStyle/>
+          <a:p>
+            <a:pPr algn="l"/>
+            <a:r>
+              <a:rPr sz="2000" b="1" i="0">
+                <a:solidFill>
+                  <a:srgbClr val="1F2C56"/>
+                </a:solidFill>
+                <a:latin typeface="Arial"/>
+              </a:rPr>
+              <a:t>Vertriebsanlässe: das Signal und der Bedarf dahinter</a:t>
+            </a:r>
           </a:p>
         </p:txBody>
       </p:sp>
@@ -7129,8 +9766,8 @@
         </p:nvSpPr>
         <p:spPr>
           <a:xfrm>
-            <a:off x="685800" y="502920"/>
-            <a:ext cx="36576" cy="658368"/>
+            <a:off x="685800" y="1143000"/>
+            <a:ext cx="10817352" cy="25400"/>
           </a:xfrm>
           <a:prstGeom prst="rect">
             <a:avLst/>
@@ -7164,86 +9801,33 @@
           </a:p>
         </p:txBody>
       </p:sp>
-      <p:sp>
-        <p:nvSpPr>
-          <p:cNvPr id="7" name="TextBox 6"/>
-          <p:cNvSpPr txBox="1"/>
-          <p:nvPr/>
-        </p:nvSpPr>
-        <p:spPr>
-          <a:xfrm>
-            <a:off x="813816" y="502920"/>
-            <a:ext cx="10634472" cy="685800"/>
-          </a:xfrm>
-          <a:prstGeom prst="rect">
-            <a:avLst/>
-          </a:prstGeom>
-          <a:noFill/>
-        </p:spPr>
-        <p:txBody>
-          <a:bodyPr wrap="square">
-            <a:spAutoFit/>
-          </a:bodyPr>
-          <a:lstStyle/>
-          <a:p>
-            <a:pPr algn="l"/>
-            <a:r>
-              <a:rPr sz="2400" b="1" i="0">
-                <a:solidFill>
-                  <a:srgbClr val="1F2C56"/>
-                </a:solidFill>
-                <a:latin typeface="Arial"/>
-              </a:rPr>
-              <a:t>Theorie-Input: Signal oder Rauschen?</a:t>
-            </a:r>
-          </a:p>
-        </p:txBody>
-      </p:sp>
-      <p:sp>
-        <p:nvSpPr>
-          <p:cNvPr id="8" name="TextBox 7"/>
-          <p:cNvSpPr txBox="1"/>
-          <p:nvPr/>
-        </p:nvSpPr>
-        <p:spPr>
-          <a:xfrm>
-            <a:off x="685800" y="1417320"/>
-            <a:ext cx="10817352" cy="4892040"/>
-          </a:xfrm>
-          <a:prstGeom prst="rect">
-            <a:avLst/>
-          </a:prstGeom>
-          <a:noFill/>
-        </p:spPr>
-        <p:txBody>
-          <a:bodyPr wrap="square" anchor="ctr">
-            <a:spAutoFit/>
-          </a:bodyPr>
-          <a:lstStyle/>
-          <a:p>
-            <a:pPr marL="177800" indent="-177800">
-              <a:spcBef>
-                <a:spcPts val="600"/>
-              </a:spcBef>
-              <a:spcAft>
-                <a:spcPts val="200"/>
-              </a:spcAft>
-            </a:pPr>
-            <a:r>
-              <a:rPr sz="1200" i="1">
-                <a:solidFill>
-                  <a:srgbClr val="3D5466"/>
-                </a:solidFill>
-                <a:latin typeface="Arial"/>
-              </a:rPr>
-              <a:t>→  Praxishinweis: Erst die Einladung, dann die Anlässe</a:t>
-            </a:r>
-          </a:p>
-        </p:txBody>
-      </p:sp>
-      <p:sp>
-        <p:nvSpPr>
-          <p:cNvPr id="9" name="Rectangle 8"/>
+      <p:pic>
+        <p:nvPicPr>
+          <p:cNvPr id="7" name="Picture 6" descr="image.png"/>
+          <p:cNvPicPr>
+            <a:picLocks noChangeAspect="1"/>
+          </p:cNvPicPr>
+          <p:nvPr/>
+        </p:nvPicPr>
+        <p:blipFill>
+          <a:blip r:embed="rId2"/>
+          <a:stretch>
+            <a:fillRect/>
+          </a:stretch>
+        </p:blipFill>
+        <p:spPr>
+          <a:xfrm>
+            <a:off x="2009463" y="1325880"/>
+            <a:ext cx="8170026" cy="4937760"/>
+          </a:xfrm>
+          <a:prstGeom prst="rect">
+            <a:avLst/>
+          </a:prstGeom>
+        </p:spPr>
+      </p:pic>
+      <p:sp>
+        <p:nvSpPr>
+          <p:cNvPr id="8" name="Rectangle 7"/>
           <p:cNvSpPr/>
           <p:nvPr/>
         </p:nvSpPr>
@@ -7286,7 +9870,7 @@
       </p:sp>
       <p:sp>
         <p:nvSpPr>
-          <p:cNvPr id="10" name="TextBox 9"/>
+          <p:cNvPr id="9" name="TextBox 8"/>
           <p:cNvSpPr txBox="1"/>
           <p:nvPr/>
         </p:nvSpPr>
@@ -7315,6 +9899,41 @@
                 <a:latin typeface="Consolas"/>
               </a:rPr>
               <a:t>FKB Campus  ·  VA09</a:t>
+            </a:r>
+          </a:p>
+        </p:txBody>
+      </p:sp>
+      <p:sp>
+        <p:nvSpPr>
+          <p:cNvPr id="10" name="TextBox 9"/>
+          <p:cNvSpPr txBox="1"/>
+          <p:nvPr/>
+        </p:nvSpPr>
+        <p:spPr>
+          <a:xfrm>
+            <a:off x="7176211" y="6583680"/>
+            <a:ext cx="4326940" cy="256032"/>
+          </a:xfrm>
+          <a:prstGeom prst="rect">
+            <a:avLst/>
+          </a:prstGeom>
+          <a:noFill/>
+        </p:spPr>
+        <p:txBody>
+          <a:bodyPr wrap="none">
+            <a:spAutoFit/>
+          </a:bodyPr>
+          <a:lstStyle/>
+          <a:p>
+            <a:pPr algn="r"/>
+            <a:r>
+              <a:rPr sz="700">
+                <a:solidFill>
+                  <a:srgbClr val="A0B4D2"/>
+                </a:solidFill>
+                <a:latin typeface="Consolas"/>
+              </a:rPr>
+              <a:t>Schaubild</a:t>
             </a:r>
           </a:p>
         </p:txBody>
@@ -7352,7 +9971,7 @@
             <a:avLst/>
           </a:prstGeom>
           <a:solidFill>
-            <a:srgbClr val="EDEDF3"/>
+            <a:srgbClr val="1F2C56"/>
           </a:solidFill>
           <a:ln>
             <a:noFill/>
@@ -7382,57 +10001,14 @@
       </p:sp>
       <p:sp>
         <p:nvSpPr>
-          <p:cNvPr id="3" name="Rectangle 2"/>
-          <p:cNvSpPr/>
-          <p:nvPr/>
-        </p:nvSpPr>
-        <p:spPr>
-          <a:xfrm>
-            <a:off x="0" y="0"/>
-            <a:ext cx="12188952" cy="50292"/>
-          </a:xfrm>
-          <a:prstGeom prst="rect">
-            <a:avLst/>
-          </a:prstGeom>
-          <a:solidFill>
-            <a:srgbClr val="1F2C56"/>
-          </a:solidFill>
-          <a:ln>
-            <a:noFill/>
-          </a:ln>
-        </p:spPr>
-        <p:style>
-          <a:lnRef idx="1">
-            <a:schemeClr val="accent1"/>
-          </a:lnRef>
-          <a:fillRef idx="3">
-            <a:schemeClr val="accent1"/>
-          </a:fillRef>
-          <a:effectRef idx="2">
-            <a:schemeClr val="accent1"/>
-          </a:effectRef>
-          <a:fontRef idx="minor">
-            <a:schemeClr val="lt1"/>
-          </a:fontRef>
-        </p:style>
-        <p:txBody>
-          <a:bodyPr rtlCol="0" anchor="ctr"/>
-          <a:lstStyle/>
-          <a:p>
-            <a:pPr algn="ctr"/>
-          </a:p>
-        </p:txBody>
-      </p:sp>
-      <p:sp>
-        <p:nvSpPr>
-          <p:cNvPr id="4" name="TextBox 3"/>
+          <p:cNvPr id="3" name="TextBox 2"/>
           <p:cNvSpPr txBox="1"/>
           <p:nvPr/>
         </p:nvSpPr>
         <p:spPr>
           <a:xfrm>
-            <a:off x="685800" y="109728"/>
-            <a:ext cx="10817352" cy="228600"/>
+            <a:off x="685800" y="2377440"/>
+            <a:ext cx="10817352" cy="365760"/>
           </a:xfrm>
           <a:prstGeom prst="rect">
             <a:avLst/>
@@ -7447,70 +10023,27 @@
           <a:p>
             <a:pPr algn="l"/>
             <a:r>
-              <a:rPr sz="750">
-                <a:solidFill>
-                  <a:srgbClr val="78808C"/>
+              <a:rPr sz="1200">
+                <a:solidFill>
+                  <a:srgbClr val="D9C089"/>
                 </a:solidFill>
                 <a:latin typeface="Consolas"/>
               </a:rPr>
-              <a:t>VA09  ·  ARBEITSBLATT</a:t>
-            </a:r>
-          </a:p>
-        </p:txBody>
-      </p:sp>
-      <p:sp>
-        <p:nvSpPr>
-          <p:cNvPr id="5" name="Rectangle 4"/>
+              <a:t>00:20–00:35</a:t>
+            </a:r>
+          </a:p>
+        </p:txBody>
+      </p:sp>
+      <p:sp>
+        <p:nvSpPr>
+          <p:cNvPr id="4" name="Rectangle 3"/>
           <p:cNvSpPr/>
           <p:nvPr/>
         </p:nvSpPr>
         <p:spPr>
           <a:xfrm>
-            <a:off x="0" y="1234440"/>
-            <a:ext cx="12188952" cy="12700"/>
-          </a:xfrm>
-          <a:prstGeom prst="rect">
-            <a:avLst/>
-          </a:prstGeom>
-          <a:solidFill>
-            <a:srgbClr val="D8DFE4"/>
-          </a:solidFill>
-          <a:ln>
-            <a:noFill/>
-          </a:ln>
-        </p:spPr>
-        <p:style>
-          <a:lnRef idx="1">
-            <a:schemeClr val="accent1"/>
-          </a:lnRef>
-          <a:fillRef idx="3">
-            <a:schemeClr val="accent1"/>
-          </a:fillRef>
-          <a:effectRef idx="2">
-            <a:schemeClr val="accent1"/>
-          </a:effectRef>
-          <a:fontRef idx="minor">
-            <a:schemeClr val="lt1"/>
-          </a:fontRef>
-        </p:style>
-        <p:txBody>
-          <a:bodyPr rtlCol="0" anchor="ctr"/>
-          <a:lstStyle/>
-          <a:p>
-            <a:pPr algn="ctr"/>
-          </a:p>
-        </p:txBody>
-      </p:sp>
-      <p:sp>
-        <p:nvSpPr>
-          <p:cNvPr id="6" name="Rectangle 5"/>
-          <p:cNvSpPr/>
-          <p:nvPr/>
-        </p:nvSpPr>
-        <p:spPr>
-          <a:xfrm>
-            <a:off x="685800" y="502920"/>
-            <a:ext cx="36576" cy="658368"/>
+            <a:off x="685800" y="2788920"/>
+            <a:ext cx="548640" cy="38100"/>
           </a:xfrm>
           <a:prstGeom prst="rect">
             <a:avLst/>
@@ -7546,14 +10079,14 @@
       </p:sp>
       <p:sp>
         <p:nvSpPr>
-          <p:cNvPr id="7" name="TextBox 6"/>
+          <p:cNvPr id="5" name="TextBox 4"/>
           <p:cNvSpPr txBox="1"/>
           <p:nvPr/>
         </p:nvSpPr>
         <p:spPr>
           <a:xfrm>
-            <a:off x="813816" y="502920"/>
-            <a:ext cx="10634472" cy="685800"/>
+            <a:off x="685800" y="3017520"/>
+            <a:ext cx="10817352" cy="1463040"/>
           </a:xfrm>
           <a:prstGeom prst="rect">
             <a:avLst/>
@@ -7568,27 +10101,27 @@
           <a:p>
             <a:pPr algn="l"/>
             <a:r>
-              <a:rPr sz="2400" b="1" i="0">
-                <a:solidFill>
-                  <a:srgbClr val="1F2C56"/>
+              <a:rPr sz="4000" b="1" i="0">
+                <a:solidFill>
+                  <a:srgbClr val="FFFFFF"/>
                 </a:solidFill>
                 <a:latin typeface="Arial"/>
               </a:rPr>
-              <a:t>Praxisfall: Anlass-Screening im Portfolio</a:t>
-            </a:r>
-          </a:p>
-        </p:txBody>
-      </p:sp>
-      <p:sp>
-        <p:nvSpPr>
-          <p:cNvPr id="8" name="TextBox 7"/>
+              <a:t>Theorie-Input 2</a:t>
+            </a:r>
+          </a:p>
+        </p:txBody>
+      </p:sp>
+      <p:sp>
+        <p:nvSpPr>
+          <p:cNvPr id="6" name="TextBox 5"/>
           <p:cNvSpPr txBox="1"/>
           <p:nvPr/>
         </p:nvSpPr>
         <p:spPr>
           <a:xfrm>
-            <a:off x="685800" y="1554480"/>
-            <a:ext cx="10817352" cy="3840480"/>
+            <a:off x="685800" y="4480560"/>
+            <a:ext cx="8653881" cy="1280160"/>
           </a:xfrm>
           <a:prstGeom prst="rect">
             <a:avLst/>
@@ -7601,233 +10134,29 @@
           </a:bodyPr>
           <a:lstStyle/>
           <a:p>
-            <a:pPr marL="190500" indent="-190500">
-              <a:spcBef>
-                <a:spcPts val="400"/>
-              </a:spcBef>
-              <a:spcAft>
-                <a:spcPts val="200"/>
-              </a:spcAft>
-            </a:pPr>
-            <a:r>
-              <a:rPr sz="1400">
-                <a:solidFill>
-                  <a:srgbClr val="3D5466"/>
+            <a:pPr algn="l"/>
+            <a:r>
+              <a:rPr sz="1600" b="0" i="0">
+                <a:solidFill>
+                  <a:srgbClr val="C8D2E6"/>
                 </a:solidFill>
                 <a:latin typeface="Arial"/>
               </a:rPr>
-              <a:t>▸  Ausgangslage (anonymisiert)</a:t>
-            </a:r>
-          </a:p>
-          <a:p>
-            <a:pPr marL="190500" indent="-190500">
-              <a:spcBef>
-                <a:spcPts val="400"/>
-              </a:spcBef>
-              <a:spcAft>
-                <a:spcPts val="200"/>
-              </a:spcAft>
-            </a:pPr>
-            <a:r>
-              <a:rPr sz="1400">
-                <a:solidFill>
-                  <a:srgbClr val="3D5466"/>
-                </a:solidFill>
-                <a:latin typeface="Arial"/>
-              </a:rPr>
-              <a:t>▸  Sie screenen ein Teilportfolio (VR-Bank Musterregion eG) auf Anlässe und finden:</a:t>
-            </a:r>
-          </a:p>
-          <a:p>
-            <a:pPr marL="190500" indent="-190500">
-              <a:spcBef>
-                <a:spcPts val="400"/>
-              </a:spcBef>
-              <a:spcAft>
-                <a:spcPts val="200"/>
-              </a:spcAft>
-            </a:pPr>
-            <a:r>
-              <a:rPr sz="1400">
-                <a:solidFill>
-                  <a:srgbClr val="3D5466"/>
-                </a:solidFill>
-                <a:latin typeface="Arial"/>
-              </a:rPr>
-              <a:t>▸  Anlässe erkennen</a:t>
-            </a:r>
-          </a:p>
-          <a:p>
-            <a:pPr marL="190500" indent="-190500">
-              <a:spcBef>
-                <a:spcPts val="400"/>
-              </a:spcBef>
-              <a:spcAft>
-                <a:spcPts val="200"/>
-              </a:spcAft>
-            </a:pPr>
-            <a:r>
-              <a:rPr sz="1400">
-                <a:solidFill>
-                  <a:srgbClr val="3D5466"/>
-                </a:solidFill>
-                <a:latin typeface="Arial"/>
-              </a:rPr>
-              <a:t>▸  Anleitung: Markieren Sie für jede Beobachtung den Anlasstyp und einen möglichen Bedarf.</a:t>
-            </a:r>
-          </a:p>
-          <a:p>
-            <a:pPr marL="190500" indent="-190500">
-              <a:spcBef>
-                <a:spcPts val="400"/>
-              </a:spcBef>
-              <a:spcAft>
-                <a:spcPts val="200"/>
-              </a:spcAft>
-            </a:pPr>
-            <a:r>
-              <a:rPr sz="1400">
-                <a:solidFill>
-                  <a:srgbClr val="3D5466"/>
-                </a:solidFill>
-                <a:latin typeface="Arial"/>
-              </a:rPr>
-              <a:t>▸  Relevanz bewerten und priorisieren</a:t>
-            </a:r>
-          </a:p>
-        </p:txBody>
-      </p:sp>
-      <p:sp>
-        <p:nvSpPr>
-          <p:cNvPr id="9" name="Rectangle 8"/>
-          <p:cNvSpPr/>
-          <p:nvPr/>
-        </p:nvSpPr>
-        <p:spPr>
-          <a:xfrm>
-            <a:off x="685800" y="5486400"/>
-            <a:ext cx="10817352" cy="640080"/>
-          </a:xfrm>
-          <a:prstGeom prst="rect">
-            <a:avLst/>
-          </a:prstGeom>
-          <a:solidFill>
-            <a:srgbClr val="1F2C56"/>
-          </a:solidFill>
-          <a:ln>
-            <a:noFill/>
-          </a:ln>
-        </p:spPr>
-        <p:style>
-          <a:lnRef idx="1">
-            <a:schemeClr val="accent1"/>
-          </a:lnRef>
-          <a:fillRef idx="3">
-            <a:schemeClr val="accent1"/>
-          </a:fillRef>
-          <a:effectRef idx="2">
-            <a:schemeClr val="accent1"/>
-          </a:effectRef>
-          <a:fontRef idx="minor">
-            <a:schemeClr val="lt1"/>
-          </a:fontRef>
-        </p:style>
-        <p:txBody>
-          <a:bodyPr rtlCol="0" anchor="ctr"/>
-          <a:lstStyle/>
-          <a:p>
-            <a:pPr algn="ctr"/>
-          </a:p>
-        </p:txBody>
-      </p:sp>
-      <p:sp>
-        <p:nvSpPr>
-          <p:cNvPr id="10" name="TextBox 9"/>
+              <a:t>Signal von Rauschen trennen – und die Co-Pilot-Haltung einnehmen.</a:t>
+            </a:r>
+          </a:p>
+        </p:txBody>
+      </p:sp>
+      <p:sp>
+        <p:nvSpPr>
+          <p:cNvPr id="7" name="TextBox 6"/>
           <p:cNvSpPr txBox="1"/>
           <p:nvPr/>
         </p:nvSpPr>
         <p:spPr>
           <a:xfrm>
-            <a:off x="868680" y="5596128"/>
-            <a:ext cx="10451592" cy="457200"/>
-          </a:xfrm>
-          <a:prstGeom prst="rect">
-            <a:avLst/>
-          </a:prstGeom>
-          <a:noFill/>
-        </p:spPr>
-        <p:txBody>
-          <a:bodyPr wrap="square">
-            <a:spAutoFit/>
-          </a:bodyPr>
-          <a:lstStyle/>
-          <a:p>
-            <a:pPr algn="l"/>
-            <a:r>
-              <a:rPr sz="1300" b="1" i="0">
-                <a:solidFill>
-                  <a:srgbClr val="FFFFFF"/>
-                </a:solidFill>
-                <a:latin typeface="Arial"/>
-              </a:rPr>
-              <a:t>→  Bearbeitung im Teilnehmer-Workbook (Arbeitsblatt mit Ausfüllfeldern)</a:t>
-            </a:r>
-          </a:p>
-        </p:txBody>
-      </p:sp>
-      <p:sp>
-        <p:nvSpPr>
-          <p:cNvPr id="11" name="Rectangle 10"/>
-          <p:cNvSpPr/>
-          <p:nvPr/>
-        </p:nvSpPr>
-        <p:spPr>
-          <a:xfrm>
-            <a:off x="0" y="6510528"/>
-            <a:ext cx="12188952" cy="347472"/>
-          </a:xfrm>
-          <a:prstGeom prst="rect">
-            <a:avLst/>
-          </a:prstGeom>
-          <a:solidFill>
-            <a:srgbClr val="0A1937"/>
-          </a:solidFill>
-          <a:ln>
-            <a:noFill/>
-          </a:ln>
-        </p:spPr>
-        <p:style>
-          <a:lnRef idx="1">
-            <a:schemeClr val="accent1"/>
-          </a:lnRef>
-          <a:fillRef idx="3">
-            <a:schemeClr val="accent1"/>
-          </a:fillRef>
-          <a:effectRef idx="2">
-            <a:schemeClr val="accent1"/>
-          </a:effectRef>
-          <a:fontRef idx="minor">
-            <a:schemeClr val="lt1"/>
-          </a:fontRef>
-        </p:style>
-        <p:txBody>
-          <a:bodyPr rtlCol="0" anchor="ctr"/>
-          <a:lstStyle/>
-          <a:p>
-            <a:pPr algn="ctr"/>
-          </a:p>
-        </p:txBody>
-      </p:sp>
-      <p:sp>
-        <p:nvSpPr>
-          <p:cNvPr id="12" name="TextBox 11"/>
-          <p:cNvSpPr txBox="1"/>
-          <p:nvPr/>
-        </p:nvSpPr>
-        <p:spPr>
-          <a:xfrm>
-            <a:off x="685800" y="6583680"/>
-            <a:ext cx="6490411" cy="256032"/>
+            <a:off x="685800" y="6355080"/>
+            <a:ext cx="10817352" cy="274320"/>
           </a:xfrm>
           <a:prstGeom prst="rect">
             <a:avLst/>
@@ -7844,7 +10173,7 @@
             <a:r>
               <a:rPr sz="700">
                 <a:solidFill>
-                  <a:srgbClr val="A0B4D2"/>
+                  <a:srgbClr val="8CA0C3"/>
                 </a:solidFill>
                 <a:latin typeface="Consolas"/>
               </a:rPr>
@@ -8108,7 +10437,7 @@
                 </a:solidFill>
                 <a:latin typeface="Arial"/>
               </a:rPr>
-              <a:t>Reflexionsfragen</a:t>
+              <a:t>Signal oder Rauschen?</a:t>
             </a:r>
           </a:p>
         </p:txBody>
@@ -8130,10 +10459,48 @@
           <a:noFill/>
         </p:spPr>
         <p:txBody>
-          <a:bodyPr wrap="square" anchor="ctr">
+          <a:bodyPr wrap="square">
             <a:spAutoFit/>
           </a:bodyPr>
           <a:lstStyle/>
+          <a:p>
+            <a:pPr marL="177800" indent="-177800">
+              <a:spcBef>
+                <a:spcPts val="600"/>
+              </a:spcBef>
+              <a:spcAft>
+                <a:spcPts val="200"/>
+              </a:spcAft>
+            </a:pPr>
+            <a:r>
+              <a:rPr sz="1200" i="1">
+                <a:solidFill>
+                  <a:srgbClr val="3D5466"/>
+                </a:solidFill>
+                <a:latin typeface="Arial"/>
+              </a:rPr>
+              <a:t>→  Das Aussortieren ist genauso wertvoll wie das Erkennen – der Innendienst reicht kein Datenrauschen weiter.</a:t>
+            </a:r>
+          </a:p>
+          <a:p>
+            <a:pPr>
+              <a:spcBef>
+                <a:spcPts val="1000"/>
+              </a:spcBef>
+              <a:spcAft>
+                <a:spcPts val="200"/>
+              </a:spcAft>
+            </a:pPr>
+            <a:r>
+              <a:rPr sz="800" b="1">
+                <a:solidFill>
+                  <a:srgbClr val="78808C"/>
+                </a:solidFill>
+                <a:latin typeface="Consolas"/>
+              </a:rPr>
+              <a:t>DREI PRÜFFRAGEN</a:t>
+            </a:r>
+          </a:p>
           <a:p>
             <a:pPr marL="190500" indent="-190500">
               <a:spcBef>
@@ -8150,7 +10517,7 @@
                 </a:solidFill>
                 <a:latin typeface="Arial"/>
               </a:rPr>
-              <a:t>▸  Welchen Anlass in Ihrem Bestand haben Sie zuletzt gesehen, aber nicht weitergegeben – warum?</a:t>
+              <a:t>▸  Dauerhaft? – oder nur ein einmaliger, saisonaler Ausschlag (z. B. Weihnachtsgeschäft).</a:t>
             </a:r>
           </a:p>
           <a:p>
@@ -8169,7 +10536,7 @@
                 </a:solidFill>
                 <a:latin typeface="Arial"/>
               </a:rPr>
-              <a:t>▸  Woran erkennen Sie den Unterschied zwischen einem echten Signal und Rauschen?</a:t>
+              <a:t>▸  Situationspassend? – passt der Bedarf wirklich zu diesem Kunden?</a:t>
             </a:r>
           </a:p>
           <a:p>
@@ -8188,7 +10555,26 @@
                 </a:solidFill>
                 <a:latin typeface="Arial"/>
               </a:rPr>
-              <a:t>▸  Was hält Sie davon ab, Anlässe proaktiv beim Berater einzubringen – und wie ändern Sie das?</a:t>
+              <a:t>▸  Jetzt relevant? – ist der Zeitpunkt für ein Gespräch richtig?</a:t>
+            </a:r>
+          </a:p>
+          <a:p>
+            <a:pPr marL="190500" indent="-190500">
+              <a:spcBef>
+                <a:spcPts val="400"/>
+              </a:spcBef>
+              <a:spcAft>
+                <a:spcPts val="200"/>
+              </a:spcAft>
+            </a:pPr>
+            <a:r>
+              <a:rPr sz="1300">
+                <a:solidFill>
+                  <a:srgbClr val="3D5466"/>
+                </a:solidFill>
+                <a:latin typeface="Arial"/>
+              </a:rPr>
+              <a:t>▸  Co-Pilot-Haltung: proaktiv statt reaktiv – aber einmal fragen schützt vor Abwehrreaktionen.</a:t>
             </a:r>
           </a:p>
         </p:txBody>
